--- a/Präsentation Projekt DB.pptx
+++ b/Präsentation Projekt DB.pptx
@@ -5,10 +5,10 @@
     <p:sldMasterId id="2147483648" r:id="rId4"/>
   </p:sldMasterIdLst>
   <p:notesMasterIdLst>
-    <p:notesMasterId r:id="rId15"/>
+    <p:notesMasterId r:id="rId18"/>
   </p:notesMasterIdLst>
   <p:handoutMasterIdLst>
-    <p:handoutMasterId r:id="rId16"/>
+    <p:handoutMasterId r:id="rId19"/>
   </p:handoutMasterIdLst>
   <p:sldIdLst>
     <p:sldId id="256" r:id="rId5"/>
@@ -17,10 +17,13 @@
     <p:sldId id="280" r:id="rId8"/>
     <p:sldId id="279" r:id="rId9"/>
     <p:sldId id="281" r:id="rId10"/>
-    <p:sldId id="282" r:id="rId11"/>
-    <p:sldId id="283" r:id="rId12"/>
-    <p:sldId id="284" r:id="rId13"/>
-    <p:sldId id="285" r:id="rId14"/>
+    <p:sldId id="291" r:id="rId11"/>
+    <p:sldId id="286" r:id="rId12"/>
+    <p:sldId id="288" r:id="rId13"/>
+    <p:sldId id="289" r:id="rId14"/>
+    <p:sldId id="290" r:id="rId15"/>
+    <p:sldId id="284" r:id="rId16"/>
+    <p:sldId id="285" r:id="rId17"/>
   </p:sldIdLst>
   <p:sldSz cx="12192000" cy="6858000"/>
   <p:notesSz cx="6858000" cy="9144000"/>
@@ -133,9 +136,488 @@
 <file path=ppt/revisionInfo.xml><?xml version="1.0" encoding="utf-8"?>
 <p1510:revInfo xmlns:a="http://schemas.openxmlformats.org/drawingml/2006/main" xmlns:r="http://schemas.openxmlformats.org/officeDocument/2006/relationships" xmlns:p1510="http://schemas.microsoft.com/office/powerpoint/2015/10/main">
   <p1510:revLst>
+    <p1510:client id="{099277BF-A8D8-4A9A-AF88-8FE79D80894F}" v="160" dt="2026-07-08T13:35:07.911"/>
     <p1510:client id="{54612EB1-0AA5-4637-AC10-35644F141C81}" v="96" dt="2026-07-08T08:27:54.712"/>
   </p1510:revLst>
 </p1510:revInfo>
+</file>
+
+<file path=ppt/changesInfos/changesInfo1.xml><?xml version="1.0" encoding="utf-8"?>
+<pc:chgInfo xmlns:a="http://schemas.openxmlformats.org/drawingml/2006/main" xmlns:r="http://schemas.openxmlformats.org/officeDocument/2006/relationships" xmlns:ac="http://schemas.microsoft.com/office/drawing/2013/main/command" xmlns:pc="http://schemas.microsoft.com/office/powerpoint/2013/main/command">
+  <pc:docChgLst>
+    <pc:chgData name="Anastasios Synodinos" userId="8330ddc7-b6ee-4d31-af2d-64488b2a8e81" providerId="ADAL" clId="{9178822F-4332-40EE-9215-559C2A5E0139}"/>
+    <pc:docChg chg="undo custSel addSld delSld modSld">
+      <pc:chgData name="Anastasios Synodinos" userId="8330ddc7-b6ee-4d31-af2d-64488b2a8e81" providerId="ADAL" clId="{9178822F-4332-40EE-9215-559C2A5E0139}" dt="2026-07-08T13:35:07.911" v="849"/>
+      <pc:docMkLst>
+        <pc:docMk/>
+      </pc:docMkLst>
+      <pc:sldChg chg="addSp delSp modSp del mod addAnim delAnim modAnim">
+        <pc:chgData name="Anastasios Synodinos" userId="8330ddc7-b6ee-4d31-af2d-64488b2a8e81" providerId="ADAL" clId="{9178822F-4332-40EE-9215-559C2A5E0139}" dt="2026-07-08T13:29:56.260" v="813" actId="2696"/>
+        <pc:sldMkLst>
+          <pc:docMk/>
+          <pc:sldMk cId="4119463928" sldId="282"/>
+        </pc:sldMkLst>
+        <pc:spChg chg="ord">
+          <ac:chgData name="Anastasios Synodinos" userId="8330ddc7-b6ee-4d31-af2d-64488b2a8e81" providerId="ADAL" clId="{9178822F-4332-40EE-9215-559C2A5E0139}" dt="2026-07-08T12:54:48.069" v="98" actId="170"/>
+          <ac:spMkLst>
+            <pc:docMk/>
+            <pc:sldMk cId="4119463928" sldId="282"/>
+            <ac:spMk id="2" creationId="{96F482A4-3CEF-2DC3-8359-B906BBE03D4F}"/>
+          </ac:spMkLst>
+        </pc:spChg>
+        <pc:spChg chg="add del mod">
+          <ac:chgData name="Anastasios Synodinos" userId="8330ddc7-b6ee-4d31-af2d-64488b2a8e81" providerId="ADAL" clId="{9178822F-4332-40EE-9215-559C2A5E0139}" dt="2026-07-08T12:53:18.041" v="86" actId="113"/>
+          <ac:spMkLst>
+            <pc:docMk/>
+            <pc:sldMk cId="4119463928" sldId="282"/>
+            <ac:spMk id="4" creationId="{CE069D6A-6AB0-DA68-A7CC-A4467A9193EE}"/>
+          </ac:spMkLst>
+        </pc:spChg>
+        <pc:spChg chg="add mod ord">
+          <ac:chgData name="Anastasios Synodinos" userId="8330ddc7-b6ee-4d31-af2d-64488b2a8e81" providerId="ADAL" clId="{9178822F-4332-40EE-9215-559C2A5E0139}" dt="2026-07-08T12:54:43.744" v="97" actId="171"/>
+          <ac:spMkLst>
+            <pc:docMk/>
+            <pc:sldMk cId="4119463928" sldId="282"/>
+            <ac:spMk id="5" creationId="{BE65E0A2-7976-645E-9FA8-8B6E3F699517}"/>
+          </ac:spMkLst>
+        </pc:spChg>
+        <pc:picChg chg="del mod">
+          <ac:chgData name="Anastasios Synodinos" userId="8330ddc7-b6ee-4d31-af2d-64488b2a8e81" providerId="ADAL" clId="{9178822F-4332-40EE-9215-559C2A5E0139}" dt="2026-07-08T12:53:48.665" v="87" actId="478"/>
+          <ac:picMkLst>
+            <pc:docMk/>
+            <pc:sldMk cId="4119463928" sldId="282"/>
+            <ac:picMk id="7" creationId="{15B3857D-EFD4-44CF-3F8B-B5B3AF3543F5}"/>
+          </ac:picMkLst>
+        </pc:picChg>
+        <pc:picChg chg="add mod ord">
+          <ac:chgData name="Anastasios Synodinos" userId="8330ddc7-b6ee-4d31-af2d-64488b2a8e81" providerId="ADAL" clId="{9178822F-4332-40EE-9215-559C2A5E0139}" dt="2026-07-08T12:54:12.227" v="92" actId="171"/>
+          <ac:picMkLst>
+            <pc:docMk/>
+            <pc:sldMk cId="4119463928" sldId="282"/>
+            <ac:picMk id="8" creationId="{550597C6-019E-3FBC-FCDA-A3B955D8903A}"/>
+          </ac:picMkLst>
+        </pc:picChg>
+      </pc:sldChg>
+      <pc:sldChg chg="addSp delSp modSp del mod">
+        <pc:chgData name="Anastasios Synodinos" userId="8330ddc7-b6ee-4d31-af2d-64488b2a8e81" providerId="ADAL" clId="{9178822F-4332-40EE-9215-559C2A5E0139}" dt="2026-07-08T13:29:47.444" v="812" actId="2696"/>
+        <pc:sldMkLst>
+          <pc:docMk/>
+          <pc:sldMk cId="3080091930" sldId="283"/>
+        </pc:sldMkLst>
+        <pc:spChg chg="del mod">
+          <ac:chgData name="Anastasios Synodinos" userId="8330ddc7-b6ee-4d31-af2d-64488b2a8e81" providerId="ADAL" clId="{9178822F-4332-40EE-9215-559C2A5E0139}" dt="2026-07-08T12:56:26.441" v="104" actId="478"/>
+          <ac:spMkLst>
+            <pc:docMk/>
+            <pc:sldMk cId="3080091930" sldId="283"/>
+            <ac:spMk id="11" creationId="{67734543-B747-6EAE-5F79-1A969DF731B5}"/>
+          </ac:spMkLst>
+        </pc:spChg>
+        <pc:spChg chg="del mod">
+          <ac:chgData name="Anastasios Synodinos" userId="8330ddc7-b6ee-4d31-af2d-64488b2a8e81" providerId="ADAL" clId="{9178822F-4332-40EE-9215-559C2A5E0139}" dt="2026-07-08T12:56:21.458" v="100" actId="478"/>
+          <ac:spMkLst>
+            <pc:docMk/>
+            <pc:sldMk cId="3080091930" sldId="283"/>
+            <ac:spMk id="15" creationId="{BF44B819-2061-F84B-1899-096AB27F5522}"/>
+          </ac:spMkLst>
+        </pc:spChg>
+        <pc:picChg chg="add mod">
+          <ac:chgData name="Anastasios Synodinos" userId="8330ddc7-b6ee-4d31-af2d-64488b2a8e81" providerId="ADAL" clId="{9178822F-4332-40EE-9215-559C2A5E0139}" dt="2026-07-08T12:57:49.336" v="118" actId="1076"/>
+          <ac:picMkLst>
+            <pc:docMk/>
+            <pc:sldMk cId="3080091930" sldId="283"/>
+            <ac:picMk id="4" creationId="{1450323A-33AD-65F2-0647-6E343E73699F}"/>
+          </ac:picMkLst>
+        </pc:picChg>
+        <pc:picChg chg="mod">
+          <ac:chgData name="Anastasios Synodinos" userId="8330ddc7-b6ee-4d31-af2d-64488b2a8e81" providerId="ADAL" clId="{9178822F-4332-40EE-9215-559C2A5E0139}" dt="2026-07-08T12:57:37.969" v="116" actId="14100"/>
+          <ac:picMkLst>
+            <pc:docMk/>
+            <pc:sldMk cId="3080091930" sldId="283"/>
+            <ac:picMk id="6" creationId="{9DCD5902-E0B6-2F19-B3CD-5EA50AA11331}"/>
+          </ac:picMkLst>
+        </pc:picChg>
+        <pc:picChg chg="add mod">
+          <ac:chgData name="Anastasios Synodinos" userId="8330ddc7-b6ee-4d31-af2d-64488b2a8e81" providerId="ADAL" clId="{9178822F-4332-40EE-9215-559C2A5E0139}" dt="2026-07-08T12:57:28.937" v="113" actId="1076"/>
+          <ac:picMkLst>
+            <pc:docMk/>
+            <pc:sldMk cId="3080091930" sldId="283"/>
+            <ac:picMk id="7" creationId="{4A816350-57BE-69C0-863A-2208627F822D}"/>
+          </ac:picMkLst>
+        </pc:picChg>
+        <pc:picChg chg="mod">
+          <ac:chgData name="Anastasios Synodinos" userId="8330ddc7-b6ee-4d31-af2d-64488b2a8e81" providerId="ADAL" clId="{9178822F-4332-40EE-9215-559C2A5E0139}" dt="2026-07-08T12:57:53.935" v="119" actId="1076"/>
+          <ac:picMkLst>
+            <pc:docMk/>
+            <pc:sldMk cId="3080091930" sldId="283"/>
+            <ac:picMk id="8" creationId="{CA359531-9757-1CDB-65AF-5AF4E885185C}"/>
+          </ac:picMkLst>
+        </pc:picChg>
+        <pc:picChg chg="add mod">
+          <ac:chgData name="Anastasios Synodinos" userId="8330ddc7-b6ee-4d31-af2d-64488b2a8e81" providerId="ADAL" clId="{9178822F-4332-40EE-9215-559C2A5E0139}" dt="2026-07-08T12:58:06.798" v="123" actId="1076"/>
+          <ac:picMkLst>
+            <pc:docMk/>
+            <pc:sldMk cId="3080091930" sldId="283"/>
+            <ac:picMk id="10" creationId="{E4BB41C0-F917-954C-E27F-32DD77826DBA}"/>
+          </ac:picMkLst>
+        </pc:picChg>
+        <pc:cxnChg chg="del">
+          <ac:chgData name="Anastasios Synodinos" userId="8330ddc7-b6ee-4d31-af2d-64488b2a8e81" providerId="ADAL" clId="{9178822F-4332-40EE-9215-559C2A5E0139}" dt="2026-07-08T12:56:23.884" v="102" actId="478"/>
+          <ac:cxnSpMkLst>
+            <pc:docMk/>
+            <pc:sldMk cId="3080091930" sldId="283"/>
+            <ac:cxnSpMk id="13" creationId="{590D330D-39C3-9ECD-60F1-FC64CD85080F}"/>
+          </ac:cxnSpMkLst>
+        </pc:cxnChg>
+        <pc:cxnChg chg="del">
+          <ac:chgData name="Anastasios Synodinos" userId="8330ddc7-b6ee-4d31-af2d-64488b2a8e81" providerId="ADAL" clId="{9178822F-4332-40EE-9215-559C2A5E0139}" dt="2026-07-08T12:56:22.776" v="101" actId="478"/>
+          <ac:cxnSpMkLst>
+            <pc:docMk/>
+            <pc:sldMk cId="3080091930" sldId="283"/>
+            <ac:cxnSpMk id="16" creationId="{EB8B6C46-6C6B-54F2-FE4F-41506A98EC2A}"/>
+          </ac:cxnSpMkLst>
+        </pc:cxnChg>
+      </pc:sldChg>
+      <pc:sldChg chg="addSp delSp modSp new mod addAnim delAnim modAnim">
+        <pc:chgData name="Anastasios Synodinos" userId="8330ddc7-b6ee-4d31-af2d-64488b2a8e81" providerId="ADAL" clId="{9178822F-4332-40EE-9215-559C2A5E0139}" dt="2026-07-08T13:34:13.890" v="846"/>
+        <pc:sldMkLst>
+          <pc:docMk/>
+          <pc:sldMk cId="909906794" sldId="286"/>
+        </pc:sldMkLst>
+        <pc:spChg chg="mod">
+          <ac:chgData name="Anastasios Synodinos" userId="8330ddc7-b6ee-4d31-af2d-64488b2a8e81" providerId="ADAL" clId="{9178822F-4332-40EE-9215-559C2A5E0139}" dt="2026-07-08T12:58:48.141" v="140" actId="20577"/>
+          <ac:spMkLst>
+            <pc:docMk/>
+            <pc:sldMk cId="909906794" sldId="286"/>
+            <ac:spMk id="2" creationId="{A4620AAD-13C5-62FD-E168-21568D826509}"/>
+          </ac:spMkLst>
+        </pc:spChg>
+        <pc:spChg chg="del">
+          <ac:chgData name="Anastasios Synodinos" userId="8330ddc7-b6ee-4d31-af2d-64488b2a8e81" providerId="ADAL" clId="{9178822F-4332-40EE-9215-559C2A5E0139}" dt="2026-07-08T12:59:20.518" v="142" actId="478"/>
+          <ac:spMkLst>
+            <pc:docMk/>
+            <pc:sldMk cId="909906794" sldId="286"/>
+            <ac:spMk id="3" creationId="{134A821D-E32D-DCAC-57BC-A22F2B435967}"/>
+          </ac:spMkLst>
+        </pc:spChg>
+        <pc:spChg chg="del">
+          <ac:chgData name="Anastasios Synodinos" userId="8330ddc7-b6ee-4d31-af2d-64488b2a8e81" providerId="ADAL" clId="{9178822F-4332-40EE-9215-559C2A5E0139}" dt="2026-07-08T12:59:16.915" v="141" actId="478"/>
+          <ac:spMkLst>
+            <pc:docMk/>
+            <pc:sldMk cId="909906794" sldId="286"/>
+            <ac:spMk id="4" creationId="{68FD9753-CBBB-B586-D61B-919EE2537247}"/>
+          </ac:spMkLst>
+        </pc:spChg>
+        <pc:spChg chg="add mod">
+          <ac:chgData name="Anastasios Synodinos" userId="8330ddc7-b6ee-4d31-af2d-64488b2a8e81" providerId="ADAL" clId="{9178822F-4332-40EE-9215-559C2A5E0139}" dt="2026-07-08T13:32:01.717" v="825"/>
+          <ac:spMkLst>
+            <pc:docMk/>
+            <pc:sldMk cId="909906794" sldId="286"/>
+            <ac:spMk id="16" creationId="{EC16A758-B3F3-71C2-6675-9B0522D9630D}"/>
+          </ac:spMkLst>
+        </pc:spChg>
+        <pc:spChg chg="add mod">
+          <ac:chgData name="Anastasios Synodinos" userId="8330ddc7-b6ee-4d31-af2d-64488b2a8e81" providerId="ADAL" clId="{9178822F-4332-40EE-9215-559C2A5E0139}" dt="2026-07-08T13:32:01.717" v="825"/>
+          <ac:spMkLst>
+            <pc:docMk/>
+            <pc:sldMk cId="909906794" sldId="286"/>
+            <ac:spMk id="17" creationId="{F5C63C5E-0C21-01E1-3DAF-7EC16205F99D}"/>
+          </ac:spMkLst>
+        </pc:spChg>
+        <pc:spChg chg="add mod">
+          <ac:chgData name="Anastasios Synodinos" userId="8330ddc7-b6ee-4d31-af2d-64488b2a8e81" providerId="ADAL" clId="{9178822F-4332-40EE-9215-559C2A5E0139}" dt="2026-07-08T13:32:01.717" v="825"/>
+          <ac:spMkLst>
+            <pc:docMk/>
+            <pc:sldMk cId="909906794" sldId="286"/>
+            <ac:spMk id="18" creationId="{59ADE203-C801-4EB9-3A5A-15D7B0A4E863}"/>
+          </ac:spMkLst>
+        </pc:spChg>
+        <pc:picChg chg="add del mod">
+          <ac:chgData name="Anastasios Synodinos" userId="8330ddc7-b6ee-4d31-af2d-64488b2a8e81" providerId="ADAL" clId="{9178822F-4332-40EE-9215-559C2A5E0139}" dt="2026-07-08T13:00:06.032" v="147" actId="478"/>
+          <ac:picMkLst>
+            <pc:docMk/>
+            <pc:sldMk cId="909906794" sldId="286"/>
+            <ac:picMk id="6" creationId="{382675BB-9EBB-AA08-1C13-D56E4F923142}"/>
+          </ac:picMkLst>
+        </pc:picChg>
+        <pc:picChg chg="add del mod">
+          <ac:chgData name="Anastasios Synodinos" userId="8330ddc7-b6ee-4d31-af2d-64488b2a8e81" providerId="ADAL" clId="{9178822F-4332-40EE-9215-559C2A5E0139}" dt="2026-07-08T13:00:06.628" v="148" actId="478"/>
+          <ac:picMkLst>
+            <pc:docMk/>
+            <pc:sldMk cId="909906794" sldId="286"/>
+            <ac:picMk id="8" creationId="{8813509B-9B45-0B7C-E473-55E53CD309AF}"/>
+          </ac:picMkLst>
+        </pc:picChg>
+        <pc:picChg chg="add mod">
+          <ac:chgData name="Anastasios Synodinos" userId="8330ddc7-b6ee-4d31-af2d-64488b2a8e81" providerId="ADAL" clId="{9178822F-4332-40EE-9215-559C2A5E0139}" dt="2026-07-08T13:00:17.658" v="151" actId="14100"/>
+          <ac:picMkLst>
+            <pc:docMk/>
+            <pc:sldMk cId="909906794" sldId="286"/>
+            <ac:picMk id="10" creationId="{42EAF0FB-6F2C-596C-AEA2-42ABE9EA5D8E}"/>
+          </ac:picMkLst>
+        </pc:picChg>
+        <pc:picChg chg="add mod">
+          <ac:chgData name="Anastasios Synodinos" userId="8330ddc7-b6ee-4d31-af2d-64488b2a8e81" providerId="ADAL" clId="{9178822F-4332-40EE-9215-559C2A5E0139}" dt="2026-07-08T13:00:34.538" v="154" actId="14100"/>
+          <ac:picMkLst>
+            <pc:docMk/>
+            <pc:sldMk cId="909906794" sldId="286"/>
+            <ac:picMk id="12" creationId="{A6B1D3DE-42B2-89FC-6DE4-D6129FFF0CB5}"/>
+          </ac:picMkLst>
+        </pc:picChg>
+        <pc:picChg chg="add del">
+          <ac:chgData name="Anastasios Synodinos" userId="8330ddc7-b6ee-4d31-af2d-64488b2a8e81" providerId="ADAL" clId="{9178822F-4332-40EE-9215-559C2A5E0139}" dt="2026-07-08T13:31:48.968" v="822" actId="22"/>
+          <ac:picMkLst>
+            <pc:docMk/>
+            <pc:sldMk cId="909906794" sldId="286"/>
+            <ac:picMk id="14" creationId="{87741042-349D-8D7E-2AE5-C9F533CF1B03}"/>
+          </ac:picMkLst>
+        </pc:picChg>
+        <pc:picChg chg="add mod">
+          <ac:chgData name="Anastasios Synodinos" userId="8330ddc7-b6ee-4d31-af2d-64488b2a8e81" providerId="ADAL" clId="{9178822F-4332-40EE-9215-559C2A5E0139}" dt="2026-07-08T13:32:01.717" v="825"/>
+          <ac:picMkLst>
+            <pc:docMk/>
+            <pc:sldMk cId="909906794" sldId="286"/>
+            <ac:picMk id="15" creationId="{96EFE1FD-F970-E17A-2803-A216AB4E07F0}"/>
+          </ac:picMkLst>
+        </pc:picChg>
+      </pc:sldChg>
+      <pc:sldChg chg="addSp delSp modSp add del mod modAnim">
+        <pc:chgData name="Anastasios Synodinos" userId="8330ddc7-b6ee-4d31-af2d-64488b2a8e81" providerId="ADAL" clId="{9178822F-4332-40EE-9215-559C2A5E0139}" dt="2026-07-08T13:34:24.494" v="847" actId="47"/>
+        <pc:sldMkLst>
+          <pc:docMk/>
+          <pc:sldMk cId="903216567" sldId="287"/>
+        </pc:sldMkLst>
+        <pc:spChg chg="mod">
+          <ac:chgData name="Anastasios Synodinos" userId="8330ddc7-b6ee-4d31-af2d-64488b2a8e81" providerId="ADAL" clId="{9178822F-4332-40EE-9215-559C2A5E0139}" dt="2026-07-08T13:31:53.815" v="824" actId="1076"/>
+          <ac:spMkLst>
+            <pc:docMk/>
+            <pc:sldMk cId="903216567" sldId="287"/>
+            <ac:spMk id="2" creationId="{0FB22772-5012-A40E-1A0D-7098DE9D6C9F}"/>
+          </ac:spMkLst>
+        </pc:spChg>
+        <pc:spChg chg="add mod">
+          <ac:chgData name="Anastasios Synodinos" userId="8330ddc7-b6ee-4d31-af2d-64488b2a8e81" providerId="ADAL" clId="{9178822F-4332-40EE-9215-559C2A5E0139}" dt="2026-07-08T13:06:23.152" v="305" actId="404"/>
+          <ac:spMkLst>
+            <pc:docMk/>
+            <pc:sldMk cId="903216567" sldId="287"/>
+            <ac:spMk id="5" creationId="{92D2E66E-E509-D071-1989-044C00A71525}"/>
+          </ac:spMkLst>
+        </pc:spChg>
+        <pc:spChg chg="add mod">
+          <ac:chgData name="Anastasios Synodinos" userId="8330ddc7-b6ee-4d31-af2d-64488b2a8e81" providerId="ADAL" clId="{9178822F-4332-40EE-9215-559C2A5E0139}" dt="2026-07-08T13:06:59.711" v="312" actId="1076"/>
+          <ac:spMkLst>
+            <pc:docMk/>
+            <pc:sldMk cId="903216567" sldId="287"/>
+            <ac:spMk id="6" creationId="{07DD60BE-1474-49B1-905C-3FECAFAD6463}"/>
+          </ac:spMkLst>
+        </pc:spChg>
+        <pc:spChg chg="add mod">
+          <ac:chgData name="Anastasios Synodinos" userId="8330ddc7-b6ee-4d31-af2d-64488b2a8e81" providerId="ADAL" clId="{9178822F-4332-40EE-9215-559C2A5E0139}" dt="2026-07-08T13:31:53.815" v="824" actId="1076"/>
+          <ac:spMkLst>
+            <pc:docMk/>
+            <pc:sldMk cId="903216567" sldId="287"/>
+            <ac:spMk id="7" creationId="{9D083A7E-8C79-1C5C-BEA1-F19EBB9AAB0A}"/>
+          </ac:spMkLst>
+        </pc:spChg>
+        <pc:picChg chg="add mod">
+          <ac:chgData name="Anastasios Synodinos" userId="8330ddc7-b6ee-4d31-af2d-64488b2a8e81" providerId="ADAL" clId="{9178822F-4332-40EE-9215-559C2A5E0139}" dt="2026-07-08T13:31:53.815" v="824" actId="1076"/>
+          <ac:picMkLst>
+            <pc:docMk/>
+            <pc:sldMk cId="903216567" sldId="287"/>
+            <ac:picMk id="4" creationId="{C0503E04-5314-B00B-C9F6-C341420E3551}"/>
+          </ac:picMkLst>
+        </pc:picChg>
+        <pc:picChg chg="del">
+          <ac:chgData name="Anastasios Synodinos" userId="8330ddc7-b6ee-4d31-af2d-64488b2a8e81" providerId="ADAL" clId="{9178822F-4332-40EE-9215-559C2A5E0139}" dt="2026-07-08T13:00:42.225" v="157" actId="478"/>
+          <ac:picMkLst>
+            <pc:docMk/>
+            <pc:sldMk cId="903216567" sldId="287"/>
+            <ac:picMk id="10" creationId="{15612C75-92A6-DE84-9016-E69A2E54E436}"/>
+          </ac:picMkLst>
+        </pc:picChg>
+        <pc:picChg chg="del">
+          <ac:chgData name="Anastasios Synodinos" userId="8330ddc7-b6ee-4d31-af2d-64488b2a8e81" providerId="ADAL" clId="{9178822F-4332-40EE-9215-559C2A5E0139}" dt="2026-07-08T13:00:41.701" v="156" actId="478"/>
+          <ac:picMkLst>
+            <pc:docMk/>
+            <pc:sldMk cId="903216567" sldId="287"/>
+            <ac:picMk id="12" creationId="{8FAFEC3C-C895-4FF3-C82E-A71061E5A9FB}"/>
+          </ac:picMkLst>
+        </pc:picChg>
+      </pc:sldChg>
+      <pc:sldChg chg="addSp modSp new mod modAnim">
+        <pc:chgData name="Anastasios Synodinos" userId="8330ddc7-b6ee-4d31-af2d-64488b2a8e81" providerId="ADAL" clId="{9178822F-4332-40EE-9215-559C2A5E0139}" dt="2026-07-08T13:20:23.698" v="694" actId="404"/>
+        <pc:sldMkLst>
+          <pc:docMk/>
+          <pc:sldMk cId="2748884308" sldId="288"/>
+        </pc:sldMkLst>
+        <pc:spChg chg="mod">
+          <ac:chgData name="Anastasios Synodinos" userId="8330ddc7-b6ee-4d31-af2d-64488b2a8e81" providerId="ADAL" clId="{9178822F-4332-40EE-9215-559C2A5E0139}" dt="2026-07-08T13:07:50.427" v="325" actId="20577"/>
+          <ac:spMkLst>
+            <pc:docMk/>
+            <pc:sldMk cId="2748884308" sldId="288"/>
+            <ac:spMk id="2" creationId="{1F003AD2-1B88-440C-1422-D8A6B5A379B9}"/>
+          </ac:spMkLst>
+        </pc:spChg>
+        <pc:spChg chg="mod">
+          <ac:chgData name="Anastasios Synodinos" userId="8330ddc7-b6ee-4d31-af2d-64488b2a8e81" providerId="ADAL" clId="{9178822F-4332-40EE-9215-559C2A5E0139}" dt="2026-07-08T13:20:23.698" v="694" actId="404"/>
+          <ac:spMkLst>
+            <pc:docMk/>
+            <pc:sldMk cId="2748884308" sldId="288"/>
+            <ac:spMk id="3" creationId="{60EF2280-D31A-5F41-EC92-E7DE3B133190}"/>
+          </ac:spMkLst>
+        </pc:spChg>
+        <pc:spChg chg="mod">
+          <ac:chgData name="Anastasios Synodinos" userId="8330ddc7-b6ee-4d31-af2d-64488b2a8e81" providerId="ADAL" clId="{9178822F-4332-40EE-9215-559C2A5E0139}" dt="2026-07-08T13:16:14.629" v="509" actId="113"/>
+          <ac:spMkLst>
+            <pc:docMk/>
+            <pc:sldMk cId="2748884308" sldId="288"/>
+            <ac:spMk id="4" creationId="{E750A630-EDDE-FB78-20FD-911899EE9690}"/>
+          </ac:spMkLst>
+        </pc:spChg>
+        <pc:picChg chg="add mod">
+          <ac:chgData name="Anastasios Synodinos" userId="8330ddc7-b6ee-4d31-af2d-64488b2a8e81" providerId="ADAL" clId="{9178822F-4332-40EE-9215-559C2A5E0139}" dt="2026-07-08T13:09:04.836" v="377" actId="1076"/>
+          <ac:picMkLst>
+            <pc:docMk/>
+            <pc:sldMk cId="2748884308" sldId="288"/>
+            <ac:picMk id="6" creationId="{54EBB72D-A2D8-537C-EFF6-0CEAF39877DC}"/>
+          </ac:picMkLst>
+        </pc:picChg>
+      </pc:sldChg>
+      <pc:sldChg chg="addSp modSp new mod modAnim">
+        <pc:chgData name="Anastasios Synodinos" userId="8330ddc7-b6ee-4d31-af2d-64488b2a8e81" providerId="ADAL" clId="{9178822F-4332-40EE-9215-559C2A5E0139}" dt="2026-07-08T13:20:12.635" v="693" actId="403"/>
+        <pc:sldMkLst>
+          <pc:docMk/>
+          <pc:sldMk cId="3316670771" sldId="289"/>
+        </pc:sldMkLst>
+        <pc:spChg chg="mod">
+          <ac:chgData name="Anastasios Synodinos" userId="8330ddc7-b6ee-4d31-af2d-64488b2a8e81" providerId="ADAL" clId="{9178822F-4332-40EE-9215-559C2A5E0139}" dt="2026-07-08T13:10:28.057" v="440"/>
+          <ac:spMkLst>
+            <pc:docMk/>
+            <pc:sldMk cId="3316670771" sldId="289"/>
+            <ac:spMk id="2" creationId="{6FBAD209-3AAC-42E0-A609-D63B71D0D1DD}"/>
+          </ac:spMkLst>
+        </pc:spChg>
+        <pc:spChg chg="mod">
+          <ac:chgData name="Anastasios Synodinos" userId="8330ddc7-b6ee-4d31-af2d-64488b2a8e81" providerId="ADAL" clId="{9178822F-4332-40EE-9215-559C2A5E0139}" dt="2026-07-08T13:18:16.516" v="627" actId="14100"/>
+          <ac:spMkLst>
+            <pc:docMk/>
+            <pc:sldMk cId="3316670771" sldId="289"/>
+            <ac:spMk id="3" creationId="{2DBE624C-C8B7-DB0C-6BCB-BEAF4B7C2070}"/>
+          </ac:spMkLst>
+        </pc:spChg>
+        <pc:spChg chg="mod">
+          <ac:chgData name="Anastasios Synodinos" userId="8330ddc7-b6ee-4d31-af2d-64488b2a8e81" providerId="ADAL" clId="{9178822F-4332-40EE-9215-559C2A5E0139}" dt="2026-07-08T13:16:58.950" v="519" actId="403"/>
+          <ac:spMkLst>
+            <pc:docMk/>
+            <pc:sldMk cId="3316670771" sldId="289"/>
+            <ac:spMk id="4" creationId="{F088D5E4-21B3-7128-2CB4-7831AF3A0096}"/>
+          </ac:spMkLst>
+        </pc:spChg>
+        <pc:spChg chg="add mod">
+          <ac:chgData name="Anastasios Synodinos" userId="8330ddc7-b6ee-4d31-af2d-64488b2a8e81" providerId="ADAL" clId="{9178822F-4332-40EE-9215-559C2A5E0139}" dt="2026-07-08T13:20:12.635" v="693" actId="403"/>
+          <ac:spMkLst>
+            <pc:docMk/>
+            <pc:sldMk cId="3316670771" sldId="289"/>
+            <ac:spMk id="7" creationId="{0CDB99FB-2873-B7FF-4BED-72968D127D14}"/>
+          </ac:spMkLst>
+        </pc:spChg>
+        <pc:picChg chg="add mod">
+          <ac:chgData name="Anastasios Synodinos" userId="8330ddc7-b6ee-4d31-af2d-64488b2a8e81" providerId="ADAL" clId="{9178822F-4332-40EE-9215-559C2A5E0139}" dt="2026-07-08T13:17:12.918" v="520" actId="1076"/>
+          <ac:picMkLst>
+            <pc:docMk/>
+            <pc:sldMk cId="3316670771" sldId="289"/>
+            <ac:picMk id="6" creationId="{BB641179-30E2-87B1-1711-55149EC06FB7}"/>
+          </ac:picMkLst>
+        </pc:picChg>
+      </pc:sldChg>
+      <pc:sldChg chg="addSp modSp new mod modAnim">
+        <pc:chgData name="Anastasios Synodinos" userId="8330ddc7-b6ee-4d31-af2d-64488b2a8e81" providerId="ADAL" clId="{9178822F-4332-40EE-9215-559C2A5E0139}" dt="2026-07-08T13:35:07.911" v="849"/>
+        <pc:sldMkLst>
+          <pc:docMk/>
+          <pc:sldMk cId="3639657033" sldId="290"/>
+        </pc:sldMkLst>
+        <pc:spChg chg="mod">
+          <ac:chgData name="Anastasios Synodinos" userId="8330ddc7-b6ee-4d31-af2d-64488b2a8e81" providerId="ADAL" clId="{9178822F-4332-40EE-9215-559C2A5E0139}" dt="2026-07-08T13:21:01.876" v="710" actId="20577"/>
+          <ac:spMkLst>
+            <pc:docMk/>
+            <pc:sldMk cId="3639657033" sldId="290"/>
+            <ac:spMk id="2" creationId="{5D25399D-9B37-6F79-9130-E5F0177592B8}"/>
+          </ac:spMkLst>
+        </pc:spChg>
+        <pc:spChg chg="mod">
+          <ac:chgData name="Anastasios Synodinos" userId="8330ddc7-b6ee-4d31-af2d-64488b2a8e81" providerId="ADAL" clId="{9178822F-4332-40EE-9215-559C2A5E0139}" dt="2026-07-08T13:21:21.875" v="757" actId="20577"/>
+          <ac:spMkLst>
+            <pc:docMk/>
+            <pc:sldMk cId="3639657033" sldId="290"/>
+            <ac:spMk id="4" creationId="{FE664E15-71CA-DA4D-4BCC-93741AE2CB2D}"/>
+          </ac:spMkLst>
+        </pc:spChg>
+        <pc:picChg chg="add mod">
+          <ac:chgData name="Anastasios Synodinos" userId="8330ddc7-b6ee-4d31-af2d-64488b2a8e81" providerId="ADAL" clId="{9178822F-4332-40EE-9215-559C2A5E0139}" dt="2026-07-08T13:21:47.583" v="760" actId="1076"/>
+          <ac:picMkLst>
+            <pc:docMk/>
+            <pc:sldMk cId="3639657033" sldId="290"/>
+            <ac:picMk id="6" creationId="{ABDD90FF-7171-D089-02DA-42E7ABEFC826}"/>
+          </ac:picMkLst>
+        </pc:picChg>
+      </pc:sldChg>
+      <pc:sldChg chg="addSp modSp add mod modAnim">
+        <pc:chgData name="Anastasios Synodinos" userId="8330ddc7-b6ee-4d31-af2d-64488b2a8e81" providerId="ADAL" clId="{9178822F-4332-40EE-9215-559C2A5E0139}" dt="2026-07-08T13:29:32.016" v="811"/>
+        <pc:sldMkLst>
+          <pc:docMk/>
+          <pc:sldMk cId="1724929422" sldId="291"/>
+        </pc:sldMkLst>
+        <pc:picChg chg="add mod">
+          <ac:chgData name="Anastasios Synodinos" userId="8330ddc7-b6ee-4d31-af2d-64488b2a8e81" providerId="ADAL" clId="{9178822F-4332-40EE-9215-559C2A5E0139}" dt="2026-07-08T13:28:04.488" v="794" actId="1076"/>
+          <ac:picMkLst>
+            <pc:docMk/>
+            <pc:sldMk cId="1724929422" sldId="291"/>
+            <ac:picMk id="6" creationId="{BF0F8E0D-9B9E-EA08-75C5-925495AE829E}"/>
+          </ac:picMkLst>
+        </pc:picChg>
+        <pc:picChg chg="mod">
+          <ac:chgData name="Anastasios Synodinos" userId="8330ddc7-b6ee-4d31-af2d-64488b2a8e81" providerId="ADAL" clId="{9178822F-4332-40EE-9215-559C2A5E0139}" dt="2026-07-08T13:28:01.396" v="793" actId="14100"/>
+          <ac:picMkLst>
+            <pc:docMk/>
+            <pc:sldMk cId="1724929422" sldId="291"/>
+            <ac:picMk id="8" creationId="{AA4E19E0-31F2-E315-67B4-CF97A83D3BDC}"/>
+          </ac:picMkLst>
+        </pc:picChg>
+        <pc:picChg chg="add mod">
+          <ac:chgData name="Anastasios Synodinos" userId="8330ddc7-b6ee-4d31-af2d-64488b2a8e81" providerId="ADAL" clId="{9178822F-4332-40EE-9215-559C2A5E0139}" dt="2026-07-08T13:27:15.659" v="784" actId="1076"/>
+          <ac:picMkLst>
+            <pc:docMk/>
+            <pc:sldMk cId="1724929422" sldId="291"/>
+            <ac:picMk id="9" creationId="{CD3F3470-EC3B-4DB0-3B60-64E1120A1063}"/>
+          </ac:picMkLst>
+        </pc:picChg>
+        <pc:picChg chg="add mod">
+          <ac:chgData name="Anastasios Synodinos" userId="8330ddc7-b6ee-4d31-af2d-64488b2a8e81" providerId="ADAL" clId="{9178822F-4332-40EE-9215-559C2A5E0139}" dt="2026-07-08T13:28:27.257" v="799" actId="14100"/>
+          <ac:picMkLst>
+            <pc:docMk/>
+            <pc:sldMk cId="1724929422" sldId="291"/>
+            <ac:picMk id="11" creationId="{D169E241-3C51-E6DB-6F17-38CB257622EF}"/>
+          </ac:picMkLst>
+        </pc:picChg>
+        <pc:picChg chg="add mod modCrop">
+          <ac:chgData name="Anastasios Synodinos" userId="8330ddc7-b6ee-4d31-af2d-64488b2a8e81" providerId="ADAL" clId="{9178822F-4332-40EE-9215-559C2A5E0139}" dt="2026-07-08T13:28:23.878" v="798" actId="14100"/>
+          <ac:picMkLst>
+            <pc:docMk/>
+            <pc:sldMk cId="1724929422" sldId="291"/>
+            <ac:picMk id="12" creationId="{8808E6B3-9FBB-F3DE-F3A9-DEC2A3565681}"/>
+          </ac:picMkLst>
+        </pc:picChg>
+        <pc:picChg chg="add mod modCrop">
+          <ac:chgData name="Anastasios Synodinos" userId="8330ddc7-b6ee-4d31-af2d-64488b2a8e81" providerId="ADAL" clId="{9178822F-4332-40EE-9215-559C2A5E0139}" dt="2026-07-08T13:28:54.798" v="805" actId="1076"/>
+          <ac:picMkLst>
+            <pc:docMk/>
+            <pc:sldMk cId="1724929422" sldId="291"/>
+            <ac:picMk id="14" creationId="{69B56B34-03B5-ACBE-AA17-2A158FCDF90F}"/>
+          </ac:picMkLst>
+        </pc:picChg>
+      </pc:sldChg>
+    </pc:docChg>
+  </pc:docChgLst>
+</pc:chgInfo>
 </file>
 
 <file path=ppt/diagrams/colors1.xml><?xml version="1.0" encoding="utf-8"?>
@@ -31879,6 +32361,898 @@
           <p:cNvPr id="2" name="Titel 1">
             <a:extLst>
               <a:ext uri="{FF2B5EF4-FFF2-40B4-BE49-F238E27FC236}">
+                <a16:creationId xmlns:a16="http://schemas.microsoft.com/office/drawing/2014/main" id="{6FBAD209-3AAC-42E0-A609-D63B71D0D1DD}"/>
+              </a:ext>
+            </a:extLst>
+          </p:cNvPr>
+          <p:cNvSpPr>
+            <a:spLocks noGrp="1"/>
+          </p:cNvSpPr>
+          <p:nvPr>
+            <p:ph type="title"/>
+          </p:nvPr>
+        </p:nvSpPr>
+        <p:spPr/>
+        <p:txBody>
+          <a:bodyPr/>
+          <a:lstStyle/>
+          <a:p>
+            <a:r>
+              <a:rPr lang="de-DE" dirty="0"/>
+              <a:t>Lösungen</a:t>
+            </a:r>
+          </a:p>
+        </p:txBody>
+      </p:sp>
+      <p:sp>
+        <p:nvSpPr>
+          <p:cNvPr id="3" name="Inhaltsplatzhalter 2">
+            <a:extLst>
+              <a:ext uri="{FF2B5EF4-FFF2-40B4-BE49-F238E27FC236}">
+                <a16:creationId xmlns:a16="http://schemas.microsoft.com/office/drawing/2014/main" id="{2DBE624C-C8B7-DB0C-6BCB-BEAF4B7C2070}"/>
+              </a:ext>
+            </a:extLst>
+          </p:cNvPr>
+          <p:cNvSpPr>
+            <a:spLocks noGrp="1"/>
+          </p:cNvSpPr>
+          <p:nvPr>
+            <p:ph idx="1"/>
+          </p:nvPr>
+        </p:nvSpPr>
+        <p:spPr>
+          <a:xfrm>
+            <a:off x="7940232" y="3172620"/>
+            <a:ext cx="3483981" cy="716474"/>
+          </a:xfrm>
+        </p:spPr>
+        <p:txBody>
+          <a:bodyPr>
+            <a:normAutofit/>
+          </a:bodyPr>
+          <a:lstStyle/>
+          <a:p>
+            <a:r>
+              <a:rPr lang="de-DE" sz="2000" dirty="0"/>
+              <a:t>Preis als Attribut hinzugefügt (Stück u. Gesamt)</a:t>
+            </a:r>
+          </a:p>
+        </p:txBody>
+      </p:sp>
+      <p:sp>
+        <p:nvSpPr>
+          <p:cNvPr id="4" name="Textplatzhalter 3">
+            <a:extLst>
+              <a:ext uri="{FF2B5EF4-FFF2-40B4-BE49-F238E27FC236}">
+                <a16:creationId xmlns:a16="http://schemas.microsoft.com/office/drawing/2014/main" id="{F088D5E4-21B3-7128-2CB4-7831AF3A0096}"/>
+              </a:ext>
+            </a:extLst>
+          </p:cNvPr>
+          <p:cNvSpPr>
+            <a:spLocks noGrp="1"/>
+          </p:cNvSpPr>
+          <p:nvPr>
+            <p:ph type="body" sz="half" idx="2"/>
+          </p:nvPr>
+        </p:nvSpPr>
+        <p:spPr>
+          <a:xfrm>
+            <a:off x="1024127" y="2257506"/>
+            <a:ext cx="7182323" cy="3762294"/>
+          </a:xfrm>
+        </p:spPr>
+        <p:txBody>
+          <a:bodyPr>
+            <a:normAutofit/>
+          </a:bodyPr>
+          <a:lstStyle/>
+          <a:p>
+            <a:r>
+              <a:rPr lang="de-DE" sz="2400" dirty="0"/>
+              <a:t>Die preise für alle vergangene Bestellungen eingegeben</a:t>
+            </a:r>
+          </a:p>
+        </p:txBody>
+      </p:sp>
+      <p:pic>
+        <p:nvPicPr>
+          <p:cNvPr id="6" name="Grafik 5">
+            <a:extLst>
+              <a:ext uri="{FF2B5EF4-FFF2-40B4-BE49-F238E27FC236}">
+                <a16:creationId xmlns:a16="http://schemas.microsoft.com/office/drawing/2014/main" id="{BB641179-30E2-87B1-1711-55149EC06FB7}"/>
+              </a:ext>
+            </a:extLst>
+          </p:cNvPr>
+          <p:cNvPicPr>
+            <a:picLocks noChangeAspect="1"/>
+          </p:cNvPicPr>
+          <p:nvPr/>
+        </p:nvPicPr>
+        <p:blipFill>
+          <a:blip r:embed="rId2"/>
+          <a:stretch>
+            <a:fillRect/>
+          </a:stretch>
+        </p:blipFill>
+        <p:spPr>
+          <a:xfrm>
+            <a:off x="1116524" y="3172620"/>
+            <a:ext cx="6194363" cy="2718568"/>
+          </a:xfrm>
+          <a:prstGeom prst="rect">
+            <a:avLst/>
+          </a:prstGeom>
+        </p:spPr>
+      </p:pic>
+      <p:sp>
+        <p:nvSpPr>
+          <p:cNvPr id="7" name="Textfeld 6">
+            <a:extLst>
+              <a:ext uri="{FF2B5EF4-FFF2-40B4-BE49-F238E27FC236}">
+                <a16:creationId xmlns:a16="http://schemas.microsoft.com/office/drawing/2014/main" id="{0CDB99FB-2873-B7FF-4BED-72968D127D14}"/>
+              </a:ext>
+            </a:extLst>
+          </p:cNvPr>
+          <p:cNvSpPr txBox="1"/>
+          <p:nvPr/>
+        </p:nvSpPr>
+        <p:spPr>
+          <a:xfrm>
+            <a:off x="8079129" y="4375230"/>
+            <a:ext cx="3748142" cy="707886"/>
+          </a:xfrm>
+          <a:prstGeom prst="rect">
+            <a:avLst/>
+          </a:prstGeom>
+          <a:noFill/>
+        </p:spPr>
+        <p:txBody>
+          <a:bodyPr wrap="none" rtlCol="0">
+            <a:spAutoFit/>
+          </a:bodyPr>
+          <a:lstStyle/>
+          <a:p>
+            <a:r>
+              <a:rPr lang="de-DE" sz="2000" dirty="0"/>
+              <a:t>Die Preise von der Tabelle </a:t>
+            </a:r>
+            <a:r>
+              <a:rPr lang="de-DE" sz="2000" b="1" dirty="0" err="1"/>
+              <a:t>produkt</a:t>
+            </a:r>
+            <a:endParaRPr lang="de-DE" sz="2000" b="1" dirty="0"/>
+          </a:p>
+          <a:p>
+            <a:r>
+              <a:rPr lang="de-DE" sz="2000" dirty="0"/>
+              <a:t>ausgefüllt</a:t>
+            </a:r>
+          </a:p>
+        </p:txBody>
+      </p:sp>
+    </p:spTree>
+    <p:extLst>
+      <p:ext uri="{BB962C8B-B14F-4D97-AF65-F5344CB8AC3E}">
+        <p14:creationId xmlns:p14="http://schemas.microsoft.com/office/powerpoint/2010/main" val="3316670771"/>
+      </p:ext>
+    </p:extLst>
+  </p:cSld>
+  <p:clrMapOvr>
+    <a:masterClrMapping/>
+  </p:clrMapOvr>
+  <p:timing>
+    <p:tnLst>
+      <p:par>
+        <p:cTn id="1" dur="indefinite" restart="never" nodeType="tmRoot">
+          <p:childTnLst>
+            <p:seq concurrent="1" nextAc="seek">
+              <p:cTn id="2" dur="indefinite" nodeType="mainSeq">
+                <p:childTnLst>
+                  <p:par>
+                    <p:cTn id="3" fill="hold">
+                      <p:stCondLst>
+                        <p:cond delay="indefinite"/>
+                      </p:stCondLst>
+                      <p:childTnLst>
+                        <p:par>
+                          <p:cTn id="4" fill="hold">
+                            <p:stCondLst>
+                              <p:cond delay="0"/>
+                            </p:stCondLst>
+                            <p:childTnLst>
+                              <p:par>
+                                <p:cTn id="5" presetID="10" presetClass="entr" presetSubtype="0" fill="hold" nodeType="clickEffect">
+                                  <p:stCondLst>
+                                    <p:cond delay="0"/>
+                                  </p:stCondLst>
+                                  <p:childTnLst>
+                                    <p:set>
+                                      <p:cBhvr>
+                                        <p:cTn id="6" dur="1" fill="hold">
+                                          <p:stCondLst>
+                                            <p:cond delay="0"/>
+                                          </p:stCondLst>
+                                        </p:cTn>
+                                        <p:tgtEl>
+                                          <p:spTgt spid="4">
+                                            <p:txEl>
+                                              <p:pRg st="0" end="0"/>
+                                            </p:txEl>
+                                          </p:spTgt>
+                                        </p:tgtEl>
+                                        <p:attrNameLst>
+                                          <p:attrName>style.visibility</p:attrName>
+                                        </p:attrNameLst>
+                                      </p:cBhvr>
+                                      <p:to>
+                                        <p:strVal val="visible"/>
+                                      </p:to>
+                                    </p:set>
+                                    <p:animEffect transition="in" filter="fade">
+                                      <p:cBhvr>
+                                        <p:cTn id="7" dur="500"/>
+                                        <p:tgtEl>
+                                          <p:spTgt spid="4">
+                                            <p:txEl>
+                                              <p:pRg st="0" end="0"/>
+                                            </p:txEl>
+                                          </p:spTgt>
+                                        </p:tgtEl>
+                                      </p:cBhvr>
+                                    </p:animEffect>
+                                  </p:childTnLst>
+                                </p:cTn>
+                              </p:par>
+                            </p:childTnLst>
+                          </p:cTn>
+                        </p:par>
+                      </p:childTnLst>
+                    </p:cTn>
+                  </p:par>
+                  <p:par>
+                    <p:cTn id="8" fill="hold">
+                      <p:stCondLst>
+                        <p:cond delay="indefinite"/>
+                      </p:stCondLst>
+                      <p:childTnLst>
+                        <p:par>
+                          <p:cTn id="9" fill="hold">
+                            <p:stCondLst>
+                              <p:cond delay="0"/>
+                            </p:stCondLst>
+                            <p:childTnLst>
+                              <p:par>
+                                <p:cTn id="10" presetID="6" presetClass="entr" presetSubtype="16" fill="hold" nodeType="clickEffect">
+                                  <p:stCondLst>
+                                    <p:cond delay="0"/>
+                                  </p:stCondLst>
+                                  <p:childTnLst>
+                                    <p:set>
+                                      <p:cBhvr>
+                                        <p:cTn id="11" dur="1" fill="hold">
+                                          <p:stCondLst>
+                                            <p:cond delay="0"/>
+                                          </p:stCondLst>
+                                        </p:cTn>
+                                        <p:tgtEl>
+                                          <p:spTgt spid="6"/>
+                                        </p:tgtEl>
+                                        <p:attrNameLst>
+                                          <p:attrName>style.visibility</p:attrName>
+                                        </p:attrNameLst>
+                                      </p:cBhvr>
+                                      <p:to>
+                                        <p:strVal val="visible"/>
+                                      </p:to>
+                                    </p:set>
+                                    <p:animEffect transition="in" filter="circle(in)">
+                                      <p:cBhvr>
+                                        <p:cTn id="12" dur="2000"/>
+                                        <p:tgtEl>
+                                          <p:spTgt spid="6"/>
+                                        </p:tgtEl>
+                                      </p:cBhvr>
+                                    </p:animEffect>
+                                  </p:childTnLst>
+                                </p:cTn>
+                              </p:par>
+                            </p:childTnLst>
+                          </p:cTn>
+                        </p:par>
+                      </p:childTnLst>
+                    </p:cTn>
+                  </p:par>
+                  <p:par>
+                    <p:cTn id="13" fill="hold">
+                      <p:stCondLst>
+                        <p:cond delay="indefinite"/>
+                      </p:stCondLst>
+                      <p:childTnLst>
+                        <p:par>
+                          <p:cTn id="14" fill="hold">
+                            <p:stCondLst>
+                              <p:cond delay="0"/>
+                            </p:stCondLst>
+                            <p:childTnLst>
+                              <p:par>
+                                <p:cTn id="15" presetID="6" presetClass="entr" presetSubtype="16" fill="hold" grpId="0" nodeType="clickEffect">
+                                  <p:stCondLst>
+                                    <p:cond delay="0"/>
+                                  </p:stCondLst>
+                                  <p:childTnLst>
+                                    <p:set>
+                                      <p:cBhvr>
+                                        <p:cTn id="16" dur="1" fill="hold">
+                                          <p:stCondLst>
+                                            <p:cond delay="0"/>
+                                          </p:stCondLst>
+                                        </p:cTn>
+                                        <p:tgtEl>
+                                          <p:spTgt spid="3">
+                                            <p:txEl>
+                                              <p:pRg st="0" end="0"/>
+                                            </p:txEl>
+                                          </p:spTgt>
+                                        </p:tgtEl>
+                                        <p:attrNameLst>
+                                          <p:attrName>style.visibility</p:attrName>
+                                        </p:attrNameLst>
+                                      </p:cBhvr>
+                                      <p:to>
+                                        <p:strVal val="visible"/>
+                                      </p:to>
+                                    </p:set>
+                                    <p:animEffect transition="in" filter="circle(in)">
+                                      <p:cBhvr>
+                                        <p:cTn id="17" dur="2000"/>
+                                        <p:tgtEl>
+                                          <p:spTgt spid="3">
+                                            <p:txEl>
+                                              <p:pRg st="0" end="0"/>
+                                            </p:txEl>
+                                          </p:spTgt>
+                                        </p:tgtEl>
+                                      </p:cBhvr>
+                                    </p:animEffect>
+                                  </p:childTnLst>
+                                </p:cTn>
+                              </p:par>
+                            </p:childTnLst>
+                          </p:cTn>
+                        </p:par>
+                      </p:childTnLst>
+                    </p:cTn>
+                  </p:par>
+                  <p:par>
+                    <p:cTn id="18" fill="hold">
+                      <p:stCondLst>
+                        <p:cond delay="indefinite"/>
+                      </p:stCondLst>
+                      <p:childTnLst>
+                        <p:par>
+                          <p:cTn id="19" fill="hold">
+                            <p:stCondLst>
+                              <p:cond delay="0"/>
+                            </p:stCondLst>
+                            <p:childTnLst>
+                              <p:par>
+                                <p:cTn id="20" presetID="6" presetClass="entr" presetSubtype="16" fill="hold" grpId="0" nodeType="clickEffect">
+                                  <p:stCondLst>
+                                    <p:cond delay="0"/>
+                                  </p:stCondLst>
+                                  <p:childTnLst>
+                                    <p:set>
+                                      <p:cBhvr>
+                                        <p:cTn id="21" dur="1" fill="hold">
+                                          <p:stCondLst>
+                                            <p:cond delay="0"/>
+                                          </p:stCondLst>
+                                        </p:cTn>
+                                        <p:tgtEl>
+                                          <p:spTgt spid="7"/>
+                                        </p:tgtEl>
+                                        <p:attrNameLst>
+                                          <p:attrName>style.visibility</p:attrName>
+                                        </p:attrNameLst>
+                                      </p:cBhvr>
+                                      <p:to>
+                                        <p:strVal val="visible"/>
+                                      </p:to>
+                                    </p:set>
+                                    <p:animEffect transition="in" filter="circle(in)">
+                                      <p:cBhvr>
+                                        <p:cTn id="22" dur="2000"/>
+                                        <p:tgtEl>
+                                          <p:spTgt spid="7"/>
+                                        </p:tgtEl>
+                                      </p:cBhvr>
+                                    </p:animEffect>
+                                  </p:childTnLst>
+                                </p:cTn>
+                              </p:par>
+                            </p:childTnLst>
+                          </p:cTn>
+                        </p:par>
+                      </p:childTnLst>
+                    </p:cTn>
+                  </p:par>
+                </p:childTnLst>
+              </p:cTn>
+              <p:prevCondLst>
+                <p:cond evt="onPrev" delay="0">
+                  <p:tgtEl>
+                    <p:sldTgt/>
+                  </p:tgtEl>
+                </p:cond>
+              </p:prevCondLst>
+              <p:nextCondLst>
+                <p:cond evt="onNext" delay="0">
+                  <p:tgtEl>
+                    <p:sldTgt/>
+                  </p:tgtEl>
+                </p:cond>
+              </p:nextCondLst>
+            </p:seq>
+          </p:childTnLst>
+        </p:cTn>
+      </p:par>
+    </p:tnLst>
+    <p:bldLst>
+      <p:bldP spid="3" grpId="0" build="p"/>
+      <p:bldP spid="7" grpId="0"/>
+    </p:bldLst>
+  </p:timing>
+</p:sld>
+</file>
+
+<file path=ppt/slides/slide11.xml><?xml version="1.0" encoding="utf-8"?>
+<p:sld xmlns:a="http://schemas.openxmlformats.org/drawingml/2006/main" xmlns:r="http://schemas.openxmlformats.org/officeDocument/2006/relationships" xmlns:p="http://schemas.openxmlformats.org/presentationml/2006/main">
+  <p:cSld>
+    <p:spTree>
+      <p:nvGrpSpPr>
+        <p:cNvPr id="1" name=""/>
+        <p:cNvGrpSpPr/>
+        <p:nvPr/>
+      </p:nvGrpSpPr>
+      <p:grpSpPr>
+        <a:xfrm>
+          <a:off x="0" y="0"/>
+          <a:ext cx="0" cy="0"/>
+          <a:chOff x="0" y="0"/>
+          <a:chExt cx="0" cy="0"/>
+        </a:xfrm>
+      </p:grpSpPr>
+      <p:sp>
+        <p:nvSpPr>
+          <p:cNvPr id="2" name="Titel 1">
+            <a:extLst>
+              <a:ext uri="{FF2B5EF4-FFF2-40B4-BE49-F238E27FC236}">
+                <a16:creationId xmlns:a16="http://schemas.microsoft.com/office/drawing/2014/main" id="{5D25399D-9B37-6F79-9130-E5F0177592B8}"/>
+              </a:ext>
+            </a:extLst>
+          </p:cNvPr>
+          <p:cNvSpPr>
+            <a:spLocks noGrp="1"/>
+          </p:cNvSpPr>
+          <p:nvPr>
+            <p:ph type="title"/>
+          </p:nvPr>
+        </p:nvSpPr>
+        <p:spPr/>
+        <p:txBody>
+          <a:bodyPr/>
+          <a:lstStyle/>
+          <a:p>
+            <a:r>
+              <a:rPr lang="de-DE" dirty="0"/>
+              <a:t>Weiter geht‘s</a:t>
+            </a:r>
+          </a:p>
+        </p:txBody>
+      </p:sp>
+      <p:sp>
+        <p:nvSpPr>
+          <p:cNvPr id="3" name="Inhaltsplatzhalter 2">
+            <a:extLst>
+              <a:ext uri="{FF2B5EF4-FFF2-40B4-BE49-F238E27FC236}">
+                <a16:creationId xmlns:a16="http://schemas.microsoft.com/office/drawing/2014/main" id="{B1DB064E-F2C6-446D-842E-5138EDB546F0}"/>
+              </a:ext>
+            </a:extLst>
+          </p:cNvPr>
+          <p:cNvSpPr>
+            <a:spLocks noGrp="1"/>
+          </p:cNvSpPr>
+          <p:nvPr>
+            <p:ph idx="1"/>
+          </p:nvPr>
+        </p:nvSpPr>
+        <p:spPr/>
+        <p:txBody>
+          <a:bodyPr/>
+          <a:lstStyle/>
+          <a:p>
+            <a:endParaRPr lang="de-DE"/>
+          </a:p>
+        </p:txBody>
+      </p:sp>
+      <p:sp>
+        <p:nvSpPr>
+          <p:cNvPr id="4" name="Textplatzhalter 3">
+            <a:extLst>
+              <a:ext uri="{FF2B5EF4-FFF2-40B4-BE49-F238E27FC236}">
+                <a16:creationId xmlns:a16="http://schemas.microsoft.com/office/drawing/2014/main" id="{FE664E15-71CA-DA4D-4BCC-93741AE2CB2D}"/>
+              </a:ext>
+            </a:extLst>
+          </p:cNvPr>
+          <p:cNvSpPr>
+            <a:spLocks noGrp="1"/>
+          </p:cNvSpPr>
+          <p:nvPr>
+            <p:ph type="body" sz="half" idx="2"/>
+          </p:nvPr>
+        </p:nvSpPr>
+        <p:spPr/>
+        <p:txBody>
+          <a:bodyPr>
+            <a:normAutofit/>
+          </a:bodyPr>
+          <a:lstStyle/>
+          <a:p>
+            <a:r>
+              <a:rPr lang="de-DE" sz="2000" dirty="0"/>
+              <a:t>Somit kommen die neue Preise ins System</a:t>
+            </a:r>
+          </a:p>
+        </p:txBody>
+      </p:sp>
+      <p:pic>
+        <p:nvPicPr>
+          <p:cNvPr id="6" name="Grafik 5">
+            <a:extLst>
+              <a:ext uri="{FF2B5EF4-FFF2-40B4-BE49-F238E27FC236}">
+                <a16:creationId xmlns:a16="http://schemas.microsoft.com/office/drawing/2014/main" id="{ABDD90FF-7171-D089-02DA-42E7ABEFC826}"/>
+              </a:ext>
+            </a:extLst>
+          </p:cNvPr>
+          <p:cNvPicPr>
+            <a:picLocks noChangeAspect="1"/>
+          </p:cNvPicPr>
+          <p:nvPr/>
+        </p:nvPicPr>
+        <p:blipFill>
+          <a:blip r:embed="rId2"/>
+          <a:stretch>
+            <a:fillRect/>
+          </a:stretch>
+        </p:blipFill>
+        <p:spPr>
+          <a:xfrm>
+            <a:off x="2620891" y="3144230"/>
+            <a:ext cx="6019609" cy="1504902"/>
+          </a:xfrm>
+          <a:prstGeom prst="rect">
+            <a:avLst/>
+          </a:prstGeom>
+        </p:spPr>
+      </p:pic>
+    </p:spTree>
+    <p:extLst>
+      <p:ext uri="{BB962C8B-B14F-4D97-AF65-F5344CB8AC3E}">
+        <p14:creationId xmlns:p14="http://schemas.microsoft.com/office/powerpoint/2010/main" val="3639657033"/>
+      </p:ext>
+    </p:extLst>
+  </p:cSld>
+  <p:clrMapOvr>
+    <a:masterClrMapping/>
+  </p:clrMapOvr>
+  <p:timing>
+    <p:tnLst>
+      <p:par>
+        <p:cTn id="1" dur="indefinite" restart="never" nodeType="tmRoot">
+          <p:childTnLst>
+            <p:seq concurrent="1" nextAc="seek">
+              <p:cTn id="2" dur="indefinite" nodeType="mainSeq">
+                <p:childTnLst>
+                  <p:par>
+                    <p:cTn id="3" fill="hold">
+                      <p:stCondLst>
+                        <p:cond delay="indefinite"/>
+                      </p:stCondLst>
+                      <p:childTnLst>
+                        <p:par>
+                          <p:cTn id="4" fill="hold">
+                            <p:stCondLst>
+                              <p:cond delay="0"/>
+                            </p:stCondLst>
+                            <p:childTnLst>
+                              <p:par>
+                                <p:cTn id="5" presetID="14" presetClass="entr" presetSubtype="10" fill="hold" nodeType="clickEffect">
+                                  <p:stCondLst>
+                                    <p:cond delay="0"/>
+                                  </p:stCondLst>
+                                  <p:childTnLst>
+                                    <p:set>
+                                      <p:cBhvr>
+                                        <p:cTn id="6" dur="1" fill="hold">
+                                          <p:stCondLst>
+                                            <p:cond delay="0"/>
+                                          </p:stCondLst>
+                                        </p:cTn>
+                                        <p:tgtEl>
+                                          <p:spTgt spid="6"/>
+                                        </p:tgtEl>
+                                        <p:attrNameLst>
+                                          <p:attrName>style.visibility</p:attrName>
+                                        </p:attrNameLst>
+                                      </p:cBhvr>
+                                      <p:to>
+                                        <p:strVal val="visible"/>
+                                      </p:to>
+                                    </p:set>
+                                    <p:animEffect transition="in" filter="randombar(horizontal)">
+                                      <p:cBhvr>
+                                        <p:cTn id="7" dur="1000"/>
+                                        <p:tgtEl>
+                                          <p:spTgt spid="6"/>
+                                        </p:tgtEl>
+                                      </p:cBhvr>
+                                    </p:animEffect>
+                                  </p:childTnLst>
+                                </p:cTn>
+                              </p:par>
+                            </p:childTnLst>
+                          </p:cTn>
+                        </p:par>
+                      </p:childTnLst>
+                    </p:cTn>
+                  </p:par>
+                </p:childTnLst>
+              </p:cTn>
+              <p:prevCondLst>
+                <p:cond evt="onPrev" delay="0">
+                  <p:tgtEl>
+                    <p:sldTgt/>
+                  </p:tgtEl>
+                </p:cond>
+              </p:prevCondLst>
+              <p:nextCondLst>
+                <p:cond evt="onNext" delay="0">
+                  <p:tgtEl>
+                    <p:sldTgt/>
+                  </p:tgtEl>
+                </p:cond>
+              </p:nextCondLst>
+            </p:seq>
+          </p:childTnLst>
+        </p:cTn>
+      </p:par>
+    </p:tnLst>
+  </p:timing>
+</p:sld>
+</file>
+
+<file path=ppt/slides/slide12.xml><?xml version="1.0" encoding="utf-8"?>
+<p:sld xmlns:a="http://schemas.openxmlformats.org/drawingml/2006/main" xmlns:r="http://schemas.openxmlformats.org/officeDocument/2006/relationships" xmlns:p="http://schemas.openxmlformats.org/presentationml/2006/main">
+  <p:cSld>
+    <p:spTree>
+      <p:nvGrpSpPr>
+        <p:cNvPr id="1" name=""/>
+        <p:cNvGrpSpPr/>
+        <p:nvPr/>
+      </p:nvGrpSpPr>
+      <p:grpSpPr>
+        <a:xfrm>
+          <a:off x="0" y="0"/>
+          <a:ext cx="0" cy="0"/>
+          <a:chOff x="0" y="0"/>
+          <a:chExt cx="0" cy="0"/>
+        </a:xfrm>
+      </p:grpSpPr>
+      <p:sp>
+        <p:nvSpPr>
+          <p:cNvPr id="2" name="Titel 1">
+            <a:extLst>
+              <a:ext uri="{FF2B5EF4-FFF2-40B4-BE49-F238E27FC236}">
+                <a16:creationId xmlns:a16="http://schemas.microsoft.com/office/drawing/2014/main" id="{1BCA5723-41A6-3F86-93CB-F5DBDA04C9B7}"/>
+              </a:ext>
+            </a:extLst>
+          </p:cNvPr>
+          <p:cNvSpPr>
+            <a:spLocks noGrp="1"/>
+          </p:cNvSpPr>
+          <p:nvPr>
+            <p:ph type="title"/>
+          </p:nvPr>
+        </p:nvSpPr>
+        <p:spPr>
+          <a:xfrm>
+            <a:off x="1024128" y="585216"/>
+            <a:ext cx="9720072" cy="1499616"/>
+          </a:xfrm>
+        </p:spPr>
+        <p:txBody>
+          <a:bodyPr anchor="ctr">
+            <a:normAutofit/>
+          </a:bodyPr>
+          <a:lstStyle/>
+          <a:p>
+            <a:r>
+              <a:rPr lang="de-DE" dirty="0"/>
+              <a:t>Komplexe SQL-Abfragen &amp; Tests</a:t>
+            </a:r>
+          </a:p>
+        </p:txBody>
+      </p:sp>
+      <p:pic>
+        <p:nvPicPr>
+          <p:cNvPr id="4" name="Inhaltsplatzhalter 3">
+            <a:extLst>
+              <a:ext uri="{FF2B5EF4-FFF2-40B4-BE49-F238E27FC236}">
+                <a16:creationId xmlns:a16="http://schemas.microsoft.com/office/drawing/2014/main" id="{02BC6DB6-5B84-37D0-3CED-F7872BBC6717}"/>
+              </a:ext>
+            </a:extLst>
+          </p:cNvPr>
+          <p:cNvPicPr>
+            <a:picLocks noGrp="1" noChangeAspect="1"/>
+          </p:cNvPicPr>
+          <p:nvPr>
+            <p:ph idx="1"/>
+          </p:nvPr>
+        </p:nvPicPr>
+        <p:blipFill>
+          <a:blip r:embed="rId2"/>
+          <a:stretch>
+            <a:fillRect/>
+          </a:stretch>
+        </p:blipFill>
+        <p:spPr>
+          <a:xfrm>
+            <a:off x="1024128" y="2543052"/>
+            <a:ext cx="5295392" cy="1636118"/>
+          </a:xfrm>
+          <a:prstGeom prst="rect">
+            <a:avLst/>
+          </a:prstGeom>
+        </p:spPr>
+      </p:pic>
+      <p:pic>
+        <p:nvPicPr>
+          <p:cNvPr id="6" name="Grafik 5">
+            <a:extLst>
+              <a:ext uri="{FF2B5EF4-FFF2-40B4-BE49-F238E27FC236}">
+                <a16:creationId xmlns:a16="http://schemas.microsoft.com/office/drawing/2014/main" id="{3AB440EF-602F-76D1-BCC8-8FA0E2526F81}"/>
+              </a:ext>
+            </a:extLst>
+          </p:cNvPr>
+          <p:cNvPicPr>
+            <a:picLocks noChangeAspect="1"/>
+          </p:cNvPicPr>
+          <p:nvPr/>
+        </p:nvPicPr>
+        <p:blipFill>
+          <a:blip r:embed="rId3"/>
+          <a:srcRect l="13225"/>
+          <a:stretch>
+            <a:fillRect/>
+          </a:stretch>
+        </p:blipFill>
+        <p:spPr>
+          <a:xfrm>
+            <a:off x="1412239" y="4439539"/>
+            <a:ext cx="3967768" cy="1585341"/>
+          </a:xfrm>
+          <a:prstGeom prst="rect">
+            <a:avLst/>
+          </a:prstGeom>
+        </p:spPr>
+      </p:pic>
+      <p:pic>
+        <p:nvPicPr>
+          <p:cNvPr id="8" name="Grafik 7">
+            <a:extLst>
+              <a:ext uri="{FF2B5EF4-FFF2-40B4-BE49-F238E27FC236}">
+                <a16:creationId xmlns:a16="http://schemas.microsoft.com/office/drawing/2014/main" id="{25EC8704-3564-19D3-BAA3-E563F63878E6}"/>
+              </a:ext>
+            </a:extLst>
+          </p:cNvPr>
+          <p:cNvPicPr>
+            <a:picLocks noChangeAspect="1"/>
+          </p:cNvPicPr>
+          <p:nvPr/>
+        </p:nvPicPr>
+        <p:blipFill>
+          <a:blip r:embed="rId4"/>
+          <a:stretch>
+            <a:fillRect/>
+          </a:stretch>
+        </p:blipFill>
+        <p:spPr>
+          <a:xfrm>
+            <a:off x="6319520" y="2543052"/>
+            <a:ext cx="5287113" cy="1295581"/>
+          </a:xfrm>
+          <a:prstGeom prst="rect">
+            <a:avLst/>
+          </a:prstGeom>
+        </p:spPr>
+      </p:pic>
+      <p:pic>
+        <p:nvPicPr>
+          <p:cNvPr id="11" name="Grafik 10">
+            <a:extLst>
+              <a:ext uri="{FF2B5EF4-FFF2-40B4-BE49-F238E27FC236}">
+                <a16:creationId xmlns:a16="http://schemas.microsoft.com/office/drawing/2014/main" id="{CBCA025F-C884-CC08-BFE5-D673CF9E6D24}"/>
+              </a:ext>
+            </a:extLst>
+          </p:cNvPr>
+          <p:cNvPicPr>
+            <a:picLocks noChangeAspect="1"/>
+          </p:cNvPicPr>
+          <p:nvPr/>
+        </p:nvPicPr>
+        <p:blipFill>
+          <a:blip r:embed="rId5"/>
+          <a:stretch>
+            <a:fillRect/>
+          </a:stretch>
+        </p:blipFill>
+        <p:spPr>
+          <a:xfrm>
+            <a:off x="7727238" y="4439539"/>
+            <a:ext cx="1711401" cy="1516240"/>
+          </a:xfrm>
+          <a:prstGeom prst="rect">
+            <a:avLst/>
+          </a:prstGeom>
+        </p:spPr>
+      </p:pic>
+    </p:spTree>
+    <p:extLst>
+      <p:ext uri="{BB962C8B-B14F-4D97-AF65-F5344CB8AC3E}">
+        <p14:creationId xmlns:p14="http://schemas.microsoft.com/office/powerpoint/2010/main" val="2167317683"/>
+      </p:ext>
+    </p:extLst>
+  </p:cSld>
+  <p:clrMapOvr>
+    <a:masterClrMapping/>
+  </p:clrMapOvr>
+  <mc:AlternateContent xmlns:mc="http://schemas.openxmlformats.org/markup-compatibility/2006" xmlns:p14="http://schemas.microsoft.com/office/powerpoint/2010/main">
+    <mc:Choice Requires="p14">
+      <p:transition spd="slow" p14:dur="800">
+        <p:circle/>
+      </p:transition>
+    </mc:Choice>
+    <mc:Fallback xmlns="">
+      <p:transition spd="slow">
+        <p:circle/>
+      </p:transition>
+    </mc:Fallback>
+  </mc:AlternateContent>
+</p:sld>
+</file>
+
+<file path=ppt/slides/slide13.xml><?xml version="1.0" encoding="utf-8"?>
+<p:sld xmlns:a="http://schemas.openxmlformats.org/drawingml/2006/main" xmlns:r="http://schemas.openxmlformats.org/officeDocument/2006/relationships" xmlns:p="http://schemas.openxmlformats.org/presentationml/2006/main">
+  <p:cSld>
+    <p:spTree>
+      <p:nvGrpSpPr>
+        <p:cNvPr id="1" name=""/>
+        <p:cNvGrpSpPr/>
+        <p:nvPr/>
+      </p:nvGrpSpPr>
+      <p:grpSpPr>
+        <a:xfrm>
+          <a:off x="0" y="0"/>
+          <a:ext cx="0" cy="0"/>
+          <a:chOff x="0" y="0"/>
+          <a:chExt cx="0" cy="0"/>
+        </a:xfrm>
+      </p:grpSpPr>
+      <p:sp>
+        <p:nvSpPr>
+          <p:cNvPr id="2" name="Titel 1">
+            <a:extLst>
+              <a:ext uri="{FF2B5EF4-FFF2-40B4-BE49-F238E27FC236}">
                 <a16:creationId xmlns:a16="http://schemas.microsoft.com/office/drawing/2014/main" id="{EDBDD9EC-F347-1A45-BB0D-609FCA6033D4}"/>
               </a:ext>
             </a:extLst>
@@ -34442,7 +35816,13 @@
   <p:cSld>
     <p:spTree>
       <p:nvGrpSpPr>
-        <p:cNvPr id="1" name=""/>
+        <p:cNvPr id="1" name="">
+          <a:extLst>
+            <a:ext uri="{FF2B5EF4-FFF2-40B4-BE49-F238E27FC236}">
+              <a16:creationId xmlns:a16="http://schemas.microsoft.com/office/drawing/2014/main" id="{08B13673-19B5-B7C9-3AAE-146F7C318064}"/>
+            </a:ext>
+          </a:extLst>
+        </p:cNvPr>
         <p:cNvGrpSpPr/>
         <p:nvPr/>
       </p:nvGrpSpPr>
@@ -34456,10 +35836,65 @@
       </p:grpSpPr>
       <p:sp>
         <p:nvSpPr>
+          <p:cNvPr id="5" name="Inhaltsplatzhalter 4">
+            <a:extLst>
+              <a:ext uri="{FF2B5EF4-FFF2-40B4-BE49-F238E27FC236}">
+                <a16:creationId xmlns:a16="http://schemas.microsoft.com/office/drawing/2014/main" id="{197F2197-7949-2000-2DB4-B567D687178C}"/>
+              </a:ext>
+            </a:extLst>
+          </p:cNvPr>
+          <p:cNvSpPr>
+            <a:spLocks noGrp="1"/>
+          </p:cNvSpPr>
+          <p:nvPr>
+            <p:ph idx="1"/>
+          </p:nvPr>
+        </p:nvSpPr>
+        <p:spPr/>
+        <p:txBody>
+          <a:bodyPr/>
+          <a:lstStyle/>
+          <a:p>
+            <a:endParaRPr lang="de-DE" dirty="0"/>
+          </a:p>
+        </p:txBody>
+      </p:sp>
+      <p:pic>
+        <p:nvPicPr>
+          <p:cNvPr id="8" name="Grafik 7">
+            <a:extLst>
+              <a:ext uri="{FF2B5EF4-FFF2-40B4-BE49-F238E27FC236}">
+                <a16:creationId xmlns:a16="http://schemas.microsoft.com/office/drawing/2014/main" id="{AA4E19E0-31F2-E315-67B4-CF97A83D3BDC}"/>
+              </a:ext>
+            </a:extLst>
+          </p:cNvPr>
+          <p:cNvPicPr>
+            <a:picLocks noChangeAspect="1"/>
+          </p:cNvPicPr>
+          <p:nvPr/>
+        </p:nvPicPr>
+        <p:blipFill>
+          <a:blip r:embed="rId2"/>
+          <a:stretch>
+            <a:fillRect/>
+          </a:stretch>
+        </p:blipFill>
+        <p:spPr>
+          <a:xfrm>
+            <a:off x="1024128" y="452165"/>
+            <a:ext cx="10648313" cy="5926238"/>
+          </a:xfrm>
+          <a:prstGeom prst="rect">
+            <a:avLst/>
+          </a:prstGeom>
+        </p:spPr>
+      </p:pic>
+      <p:sp>
+        <p:nvSpPr>
           <p:cNvPr id="2" name="Titel 1">
             <a:extLst>
               <a:ext uri="{FF2B5EF4-FFF2-40B4-BE49-F238E27FC236}">
-                <a16:creationId xmlns:a16="http://schemas.microsoft.com/office/drawing/2014/main" id="{96F482A4-3CEF-2DC3-8359-B906BBE03D4F}"/>
+                <a16:creationId xmlns:a16="http://schemas.microsoft.com/office/drawing/2014/main" id="{81C5FF34-BBD0-B41D-A6FC-B787AC3864B5}"/>
               </a:ext>
             </a:extLst>
           </p:cNvPr>
@@ -34487,7 +35922,7 @@
           <p:cNvPr id="4" name="Textplatzhalter 3">
             <a:extLst>
               <a:ext uri="{FF2B5EF4-FFF2-40B4-BE49-F238E27FC236}">
-                <a16:creationId xmlns:a16="http://schemas.microsoft.com/office/drawing/2014/main" id="{CE069D6A-6AB0-DA68-A7CC-A4467A9193EE}"/>
+                <a16:creationId xmlns:a16="http://schemas.microsoft.com/office/drawing/2014/main" id="{C39BC61C-332F-2B63-71C4-508613F5E8B2}"/>
               </a:ext>
             </a:extLst>
           </p:cNvPr>
@@ -34505,105 +35940,174 @@
           <a:p>
             <a:r>
               <a:rPr lang="de-DE" b="1" dirty="0"/>
-              <a:t>Kategorie (1) zu Produkt (n):</a:t>
-            </a:r>
-            <a:r>
-              <a:rPr lang="de-DE" dirty="0"/>
-              <a:t> Klares Einpflegen aller Artikel in logische Segmente über die KaID.</a:t>
+              <a:t>ER-Modell</a:t>
             </a:r>
           </a:p>
           <a:p>
             <a:r>
-              <a:rPr lang="de-DE" b="1" dirty="0"/>
-              <a:t>Lieferant (1) zu Produkt (n):</a:t>
-            </a:r>
-            <a:r>
               <a:rPr lang="de-DE" dirty="0"/>
-              <a:t> Direkte Zuordnung der Lieferanten über </a:t>
-            </a:r>
-            <a:r>
-              <a:rPr lang="de-DE" dirty="0" err="1"/>
-              <a:t>LiID</a:t>
-            </a:r>
-            <a:r>
-              <a:rPr lang="de-DE" dirty="0"/>
-              <a:t> zur Optimierung der Lieferprozesse.</a:t>
+              <a:t>Basiert auf dem EXCEL Datei</a:t>
             </a:r>
           </a:p>
           <a:p>
             <a:r>
-              <a:rPr lang="de-DE" b="1" dirty="0"/>
-              <a:t>Zusammengesetzter PK (Bestellung):</a:t>
+              <a:rPr lang="de-DE" dirty="0"/>
+              <a:t>Des </a:t>
             </a:r>
             <a:r>
-              <a:rPr lang="de-DE" dirty="0"/>
-              <a:t> Primärschlüssel aus </a:t>
+              <a:rPr lang="de-DE" dirty="0" err="1"/>
+              <a:t>Kundes</a:t>
             </a:r>
-            <a:r>
-              <a:rPr lang="de-DE" b="1" dirty="0" err="1"/>
-              <a:t>PrID</a:t>
-            </a:r>
-            <a:r>
-              <a:rPr lang="de-DE" b="1" dirty="0"/>
-              <a:t>, </a:t>
-            </a:r>
-            <a:r>
-              <a:rPr lang="de-DE" b="1" dirty="0" err="1"/>
-              <a:t>KuID</a:t>
-            </a:r>
-            <a:r>
-              <a:rPr lang="de-DE" b="1" dirty="0"/>
-              <a:t> und Datum</a:t>
-            </a:r>
-            <a:r>
-              <a:rPr lang="de-DE" dirty="0"/>
-              <a:t> sichert Eindeutigkeit.</a:t>
-            </a:r>
-          </a:p>
-          <a:p>
-            <a:r>
-              <a:rPr lang="de-DE" b="1" dirty="0"/>
-              <a:t>3. Normalform:</a:t>
-            </a:r>
-            <a:r>
-              <a:rPr lang="de-DE" dirty="0"/>
-              <a:t> Alle Nicht-Schlüsselattribute hängen voll funktional nur vom Primärschlüssel ab.</a:t>
-            </a:r>
-          </a:p>
-          <a:p>
             <a:endParaRPr lang="de-DE" dirty="0"/>
           </a:p>
         </p:txBody>
       </p:sp>
       <p:pic>
         <p:nvPicPr>
-          <p:cNvPr id="7" name="Inhaltsplatzhalter 6">
+          <p:cNvPr id="6" name="Grafik 5">
             <a:extLst>
               <a:ext uri="{FF2B5EF4-FFF2-40B4-BE49-F238E27FC236}">
-                <a16:creationId xmlns:a16="http://schemas.microsoft.com/office/drawing/2014/main" id="{15B3857D-EFD4-44CF-3F8B-B5B3AF3543F5}"/>
-              </a:ext>
-              <a:ext uri="{C183D7F6-B498-43B3-948B-1728B52AA6E4}">
-                <adec:decorative xmlns:adec="http://schemas.microsoft.com/office/drawing/2017/decorative" val="1"/>
+                <a16:creationId xmlns:a16="http://schemas.microsoft.com/office/drawing/2014/main" id="{BF0F8E0D-9B9E-EA08-75C5-925495AE829E}"/>
               </a:ext>
             </a:extLst>
           </p:cNvPr>
           <p:cNvPicPr>
-            <a:picLocks noGrp="1" noChangeAspect="1"/>
+            <a:picLocks noChangeAspect="1"/>
           </p:cNvPicPr>
-          <p:nvPr>
-            <p:ph idx="1"/>
-          </p:nvPr>
+          <p:nvPr/>
         </p:nvPicPr>
         <p:blipFill>
-          <a:blip r:embed="rId2"/>
+          <a:blip r:embed="rId3"/>
           <a:stretch>
             <a:fillRect/>
           </a:stretch>
         </p:blipFill>
         <p:spPr>
           <a:xfrm>
-            <a:off x="5715000" y="1533375"/>
-            <a:ext cx="5678488" cy="3762675"/>
+            <a:off x="576589" y="3783635"/>
+            <a:ext cx="3189502" cy="1691191"/>
+          </a:xfrm>
+          <a:prstGeom prst="rect">
+            <a:avLst/>
+          </a:prstGeom>
+        </p:spPr>
+      </p:pic>
+      <p:pic>
+        <p:nvPicPr>
+          <p:cNvPr id="9" name="Grafik 8">
+            <a:extLst>
+              <a:ext uri="{FF2B5EF4-FFF2-40B4-BE49-F238E27FC236}">
+                <a16:creationId xmlns:a16="http://schemas.microsoft.com/office/drawing/2014/main" id="{CD3F3470-EC3B-4DB0-3B60-64E1120A1063}"/>
+              </a:ext>
+            </a:extLst>
+          </p:cNvPr>
+          <p:cNvPicPr>
+            <a:picLocks noChangeAspect="1"/>
+          </p:cNvPicPr>
+          <p:nvPr/>
+        </p:nvPicPr>
+        <p:blipFill>
+          <a:blip r:embed="rId4"/>
+          <a:stretch>
+            <a:fillRect/>
+          </a:stretch>
+        </p:blipFill>
+        <p:spPr>
+          <a:xfrm>
+            <a:off x="8810248" y="479597"/>
+            <a:ext cx="3001702" cy="2335944"/>
+          </a:xfrm>
+          <a:prstGeom prst="rect">
+            <a:avLst/>
+          </a:prstGeom>
+        </p:spPr>
+      </p:pic>
+      <p:pic>
+        <p:nvPicPr>
+          <p:cNvPr id="11" name="Grafik 10">
+            <a:extLst>
+              <a:ext uri="{FF2B5EF4-FFF2-40B4-BE49-F238E27FC236}">
+                <a16:creationId xmlns:a16="http://schemas.microsoft.com/office/drawing/2014/main" id="{D169E241-3C51-E6DB-6F17-38CB257622EF}"/>
+              </a:ext>
+            </a:extLst>
+          </p:cNvPr>
+          <p:cNvPicPr>
+            <a:picLocks noChangeAspect="1"/>
+          </p:cNvPicPr>
+          <p:nvPr/>
+        </p:nvPicPr>
+        <p:blipFill>
+          <a:blip r:embed="rId5"/>
+          <a:stretch>
+            <a:fillRect/>
+          </a:stretch>
+        </p:blipFill>
+        <p:spPr>
+          <a:xfrm>
+            <a:off x="8891944" y="3891413"/>
+            <a:ext cx="3082249" cy="1953801"/>
+          </a:xfrm>
+          <a:prstGeom prst="rect">
+            <a:avLst/>
+          </a:prstGeom>
+        </p:spPr>
+      </p:pic>
+      <p:pic>
+        <p:nvPicPr>
+          <p:cNvPr id="12" name="Inhaltsplatzhalter 5">
+            <a:extLst>
+              <a:ext uri="{FF2B5EF4-FFF2-40B4-BE49-F238E27FC236}">
+                <a16:creationId xmlns:a16="http://schemas.microsoft.com/office/drawing/2014/main" id="{8808E6B3-9FBB-F3DE-F3A9-DEC2A3565681}"/>
+              </a:ext>
+            </a:extLst>
+          </p:cNvPr>
+          <p:cNvPicPr>
+            <a:picLocks noChangeAspect="1"/>
+          </p:cNvPicPr>
+          <p:nvPr/>
+        </p:nvPicPr>
+        <p:blipFill>
+          <a:blip r:embed="rId6"/>
+          <a:srcRect l="6797"/>
+          <a:stretch>
+            <a:fillRect/>
+          </a:stretch>
+        </p:blipFill>
+        <p:spPr>
+          <a:xfrm>
+            <a:off x="3900668" y="3891413"/>
+            <a:ext cx="4689524" cy="2259728"/>
+          </a:xfrm>
+          <a:prstGeom prst="rect">
+            <a:avLst/>
+          </a:prstGeom>
+        </p:spPr>
+      </p:pic>
+      <p:pic>
+        <p:nvPicPr>
+          <p:cNvPr id="14" name="Grafik 13">
+            <a:extLst>
+              <a:ext uri="{FF2B5EF4-FFF2-40B4-BE49-F238E27FC236}">
+                <a16:creationId xmlns:a16="http://schemas.microsoft.com/office/drawing/2014/main" id="{69B56B34-03B5-ACBE-AA17-2A158FCDF90F}"/>
+              </a:ext>
+            </a:extLst>
+          </p:cNvPr>
+          <p:cNvPicPr>
+            <a:picLocks noChangeAspect="1"/>
+          </p:cNvPicPr>
+          <p:nvPr/>
+        </p:nvPicPr>
+        <p:blipFill>
+          <a:blip r:embed="rId7"/>
+          <a:srcRect l="5265"/>
+          <a:stretch>
+            <a:fillRect/>
+          </a:stretch>
+        </p:blipFill>
+        <p:spPr>
+          <a:xfrm>
+            <a:off x="4616515" y="672709"/>
+            <a:ext cx="4054224" cy="2142832"/>
           </a:xfrm>
           <a:prstGeom prst="rect">
             <a:avLst/>
@@ -34613,7 +36117,7 @@
     </p:spTree>
     <p:extLst>
       <p:ext uri="{BB962C8B-B14F-4D97-AF65-F5344CB8AC3E}">
-        <p14:creationId xmlns:p14="http://schemas.microsoft.com/office/powerpoint/2010/main" val="4119463928"/>
+        <p14:creationId xmlns:p14="http://schemas.microsoft.com/office/powerpoint/2010/main" val="1724929422"/>
       </p:ext>
     </p:extLst>
   </p:cSld>
@@ -34632,9 +36136,6 @@
                     <p:cTn id="3" fill="hold">
                       <p:stCondLst>
                         <p:cond delay="indefinite"/>
-                        <p:cond evt="onBegin" delay="0">
-                          <p:tn val="2"/>
-                        </p:cond>
                       </p:stCondLst>
                       <p:childTnLst>
                         <p:par>
@@ -34644,7 +36145,7 @@
                             </p:stCondLst>
                             <p:childTnLst>
                               <p:par>
-                                <p:cTn id="5" presetID="22" presetClass="entr" presetSubtype="4" fill="hold" grpId="0" nodeType="withEffect">
+                                <p:cTn id="5" presetID="10" presetClass="entr" presetSubtype="0" fill="hold" grpId="0" nodeType="clickEffect">
                                   <p:stCondLst>
                                     <p:cond delay="0"/>
                                   </p:stCondLst>
@@ -34652,41 +36153,6 @@
                                     <p:set>
                                       <p:cBhvr>
                                         <p:cTn id="6" dur="1" fill="hold">
-                                          <p:stCondLst>
-                                            <p:cond delay="0"/>
-                                          </p:stCondLst>
-                                        </p:cTn>
-                                        <p:tgtEl>
-                                          <p:spTgt spid="2"/>
-                                        </p:tgtEl>
-                                        <p:attrNameLst>
-                                          <p:attrName>style.visibility</p:attrName>
-                                        </p:attrNameLst>
-                                      </p:cBhvr>
-                                      <p:to>
-                                        <p:strVal val="visible"/>
-                                      </p:to>
-                                    </p:set>
-                                    <p:animEffect transition="in" filter="wipe(down)">
-                                      <p:cBhvr>
-                                        <p:cTn id="7" dur="500"/>
-                                        <p:tgtEl>
-                                          <p:spTgt spid="2"/>
-                                        </p:tgtEl>
-                                      </p:cBhvr>
-                                    </p:animEffect>
-                                  </p:childTnLst>
-                                </p:cTn>
-                              </p:par>
-                              <p:par>
-                                <p:cTn id="8" presetID="22" presetClass="entr" presetSubtype="4" fill="hold" grpId="0" nodeType="withEffect">
-                                  <p:stCondLst>
-                                    <p:cond delay="0"/>
-                                  </p:stCondLst>
-                                  <p:childTnLst>
-                                    <p:set>
-                                      <p:cBhvr>
-                                        <p:cTn id="9" dur="1" fill="hold">
                                           <p:stCondLst>
                                             <p:cond delay="0"/>
                                           </p:stCondLst>
@@ -34706,9 +36172,9 @@
                                         <p:strVal val="visible"/>
                                       </p:to>
                                     </p:set>
-                                    <p:animEffect transition="in" filter="wipe(down)">
+                                    <p:animEffect transition="in" filter="fade">
                                       <p:cBhvr>
-                                        <p:cTn id="10" dur="1000"/>
+                                        <p:cTn id="7" dur="500"/>
                                         <p:tgtEl>
                                           <p:spTgt spid="4">
                                             <p:txEl>
@@ -34721,15 +36187,33 @@
                                   </p:childTnLst>
                                 </p:cTn>
                               </p:par>
+                            </p:childTnLst>
+                          </p:cTn>
+                        </p:par>
+                      </p:childTnLst>
+                    </p:cTn>
+                  </p:par>
+                  <p:par>
+                    <p:cTn id="8" fill="hold">
+                      <p:stCondLst>
+                        <p:cond delay="indefinite"/>
+                      </p:stCondLst>
+                      <p:childTnLst>
+                        <p:par>
+                          <p:cTn id="9" fill="hold">
+                            <p:stCondLst>
+                              <p:cond delay="0"/>
+                            </p:stCondLst>
+                            <p:childTnLst>
                               <p:par>
-                                <p:cTn id="11" presetID="22" presetClass="entr" presetSubtype="4" fill="hold" grpId="0" nodeType="withEffect">
+                                <p:cTn id="10" presetID="10" presetClass="entr" presetSubtype="0" fill="hold" grpId="0" nodeType="clickEffect">
                                   <p:stCondLst>
                                     <p:cond delay="0"/>
                                   </p:stCondLst>
                                   <p:childTnLst>
                                     <p:set>
                                       <p:cBhvr>
-                                        <p:cTn id="12" dur="1" fill="hold">
+                                        <p:cTn id="11" dur="1" fill="hold">
                                           <p:stCondLst>
                                             <p:cond delay="0"/>
                                           </p:stCondLst>
@@ -34749,9 +36233,9 @@
                                         <p:strVal val="visible"/>
                                       </p:to>
                                     </p:set>
-                                    <p:animEffect transition="in" filter="wipe(down)">
+                                    <p:animEffect transition="in" filter="fade">
                                       <p:cBhvr>
-                                        <p:cTn id="13" dur="1000"/>
+                                        <p:cTn id="12" dur="500"/>
                                         <p:tgtEl>
                                           <p:spTgt spid="4">
                                             <p:txEl>
@@ -34764,15 +36248,33 @@
                                   </p:childTnLst>
                                 </p:cTn>
                               </p:par>
+                            </p:childTnLst>
+                          </p:cTn>
+                        </p:par>
+                      </p:childTnLst>
+                    </p:cTn>
+                  </p:par>
+                  <p:par>
+                    <p:cTn id="13" fill="hold">
+                      <p:stCondLst>
+                        <p:cond delay="indefinite"/>
+                      </p:stCondLst>
+                      <p:childTnLst>
+                        <p:par>
+                          <p:cTn id="14" fill="hold">
+                            <p:stCondLst>
+                              <p:cond delay="0"/>
+                            </p:stCondLst>
+                            <p:childTnLst>
                               <p:par>
-                                <p:cTn id="14" presetID="22" presetClass="entr" presetSubtype="4" fill="hold" grpId="0" nodeType="withEffect">
+                                <p:cTn id="15" presetID="10" presetClass="entr" presetSubtype="0" fill="hold" grpId="0" nodeType="clickEffect">
                                   <p:stCondLst>
                                     <p:cond delay="0"/>
                                   </p:stCondLst>
                                   <p:childTnLst>
                                     <p:set>
                                       <p:cBhvr>
-                                        <p:cTn id="15" dur="1" fill="hold">
+                                        <p:cTn id="16" dur="1" fill="hold">
                                           <p:stCondLst>
                                             <p:cond delay="0"/>
                                           </p:stCondLst>
@@ -34792,9 +36294,9 @@
                                         <p:strVal val="visible"/>
                                       </p:to>
                                     </p:set>
-                                    <p:animEffect transition="in" filter="wipe(down)">
+                                    <p:animEffect transition="in" filter="fade">
                                       <p:cBhvr>
-                                        <p:cTn id="16" dur="1000"/>
+                                        <p:cTn id="17" dur="500"/>
                                         <p:tgtEl>
                                           <p:spTgt spid="4">
                                             <p:txEl>
@@ -34807,23 +36309,1140 @@
                                   </p:childTnLst>
                                 </p:cTn>
                               </p:par>
+                            </p:childTnLst>
+                          </p:cTn>
+                        </p:par>
+                      </p:childTnLst>
+                    </p:cTn>
+                  </p:par>
+                  <p:par>
+                    <p:cTn id="18" fill="hold">
+                      <p:stCondLst>
+                        <p:cond delay="indefinite"/>
+                      </p:stCondLst>
+                      <p:childTnLst>
+                        <p:par>
+                          <p:cTn id="19" fill="hold">
+                            <p:stCondLst>
+                              <p:cond delay="0"/>
+                            </p:stCondLst>
+                            <p:childTnLst>
                               <p:par>
-                                <p:cTn id="17" presetID="22" presetClass="entr" presetSubtype="4" fill="hold" grpId="0" nodeType="withEffect">
+                                <p:cTn id="20" presetID="45" presetClass="entr" presetSubtype="0" fill="hold" nodeType="clickEffect">
                                   <p:stCondLst>
                                     <p:cond delay="0"/>
                                   </p:stCondLst>
                                   <p:childTnLst>
                                     <p:set>
                                       <p:cBhvr>
-                                        <p:cTn id="18" dur="1" fill="hold">
+                                        <p:cTn id="21" dur="1" fill="hold">
                                           <p:stCondLst>
                                             <p:cond delay="0"/>
                                           </p:stCondLst>
                                         </p:cTn>
                                         <p:tgtEl>
+                                          <p:spTgt spid="8"/>
+                                        </p:tgtEl>
+                                        <p:attrNameLst>
+                                          <p:attrName>style.visibility</p:attrName>
+                                        </p:attrNameLst>
+                                      </p:cBhvr>
+                                      <p:to>
+                                        <p:strVal val="visible"/>
+                                      </p:to>
+                                    </p:set>
+                                    <p:animEffect transition="in" filter="fade">
+                                      <p:cBhvr>
+                                        <p:cTn id="22" dur="2000"/>
+                                        <p:tgtEl>
+                                          <p:spTgt spid="8"/>
+                                        </p:tgtEl>
+                                      </p:cBhvr>
+                                    </p:animEffect>
+                                    <p:anim calcmode="lin" valueType="num">
+                                      <p:cBhvr>
+                                        <p:cTn id="23" dur="2000" fill="hold"/>
+                                        <p:tgtEl>
+                                          <p:spTgt spid="8"/>
+                                        </p:tgtEl>
+                                        <p:attrNameLst>
+                                          <p:attrName>ppt_w</p:attrName>
+                                        </p:attrNameLst>
+                                      </p:cBhvr>
+                                      <p:tavLst>
+                                        <p:tav tm="0" fmla="#ppt_w*sin(2.5*pi*$)">
+                                          <p:val>
+                                            <p:fltVal val="0"/>
+                                          </p:val>
+                                        </p:tav>
+                                        <p:tav tm="100000">
+                                          <p:val>
+                                            <p:fltVal val="1"/>
+                                          </p:val>
+                                        </p:tav>
+                                      </p:tavLst>
+                                    </p:anim>
+                                    <p:anim calcmode="lin" valueType="num">
+                                      <p:cBhvr>
+                                        <p:cTn id="24" dur="2000" fill="hold"/>
+                                        <p:tgtEl>
+                                          <p:spTgt spid="8"/>
+                                        </p:tgtEl>
+                                        <p:attrNameLst>
+                                          <p:attrName>ppt_h</p:attrName>
+                                        </p:attrNameLst>
+                                      </p:cBhvr>
+                                      <p:tavLst>
+                                        <p:tav tm="0">
+                                          <p:val>
+                                            <p:strVal val="#ppt_h"/>
+                                          </p:val>
+                                        </p:tav>
+                                        <p:tav tm="100000">
+                                          <p:val>
+                                            <p:strVal val="#ppt_h"/>
+                                          </p:val>
+                                        </p:tav>
+                                      </p:tavLst>
+                                    </p:anim>
+                                  </p:childTnLst>
+                                </p:cTn>
+                              </p:par>
+                            </p:childTnLst>
+                          </p:cTn>
+                        </p:par>
+                      </p:childTnLst>
+                    </p:cTn>
+                  </p:par>
+                  <p:par>
+                    <p:cTn id="25" fill="hold">
+                      <p:stCondLst>
+                        <p:cond delay="indefinite"/>
+                      </p:stCondLst>
+                      <p:childTnLst>
+                        <p:par>
+                          <p:cTn id="26" fill="hold">
+                            <p:stCondLst>
+                              <p:cond delay="0"/>
+                            </p:stCondLst>
+                            <p:childTnLst>
+                              <p:par>
+                                <p:cTn id="27" presetID="14" presetClass="exit" presetSubtype="10" fill="hold" grpId="1" nodeType="clickEffect">
+                                  <p:stCondLst>
+                                    <p:cond delay="0"/>
+                                  </p:stCondLst>
+                                  <p:childTnLst>
+                                    <p:animEffect transition="out" filter="randombar(horizontal)">
+                                      <p:cBhvr>
+                                        <p:cTn id="28" dur="500"/>
+                                        <p:tgtEl>
                                           <p:spTgt spid="4">
                                             <p:txEl>
-                                              <p:pRg st="3" end="3"/>
+                                              <p:pRg st="0" end="0"/>
+                                            </p:txEl>
+                                          </p:spTgt>
+                                        </p:tgtEl>
+                                      </p:cBhvr>
+                                    </p:animEffect>
+                                    <p:set>
+                                      <p:cBhvr>
+                                        <p:cTn id="29" dur="1" fill="hold">
+                                          <p:stCondLst>
+                                            <p:cond delay="499"/>
+                                          </p:stCondLst>
+                                        </p:cTn>
+                                        <p:tgtEl>
+                                          <p:spTgt spid="4">
+                                            <p:txEl>
+                                              <p:pRg st="0" end="0"/>
+                                            </p:txEl>
+                                          </p:spTgt>
+                                        </p:tgtEl>
+                                        <p:attrNameLst>
+                                          <p:attrName>style.visibility</p:attrName>
+                                        </p:attrNameLst>
+                                      </p:cBhvr>
+                                      <p:to>
+                                        <p:strVal val="hidden"/>
+                                      </p:to>
+                                    </p:set>
+                                  </p:childTnLst>
+                                </p:cTn>
+                              </p:par>
+                            </p:childTnLst>
+                          </p:cTn>
+                        </p:par>
+                      </p:childTnLst>
+                    </p:cTn>
+                  </p:par>
+                  <p:par>
+                    <p:cTn id="30" fill="hold">
+                      <p:stCondLst>
+                        <p:cond delay="indefinite"/>
+                      </p:stCondLst>
+                      <p:childTnLst>
+                        <p:par>
+                          <p:cTn id="31" fill="hold">
+                            <p:stCondLst>
+                              <p:cond delay="0"/>
+                            </p:stCondLst>
+                            <p:childTnLst>
+                              <p:par>
+                                <p:cTn id="32" presetID="14" presetClass="exit" presetSubtype="10" fill="hold" grpId="1" nodeType="clickEffect">
+                                  <p:stCondLst>
+                                    <p:cond delay="0"/>
+                                  </p:stCondLst>
+                                  <p:childTnLst>
+                                    <p:animEffect transition="out" filter="randombar(horizontal)">
+                                      <p:cBhvr>
+                                        <p:cTn id="33" dur="500"/>
+                                        <p:tgtEl>
+                                          <p:spTgt spid="4">
+                                            <p:txEl>
+                                              <p:pRg st="1" end="1"/>
+                                            </p:txEl>
+                                          </p:spTgt>
+                                        </p:tgtEl>
+                                      </p:cBhvr>
+                                    </p:animEffect>
+                                    <p:set>
+                                      <p:cBhvr>
+                                        <p:cTn id="34" dur="1" fill="hold">
+                                          <p:stCondLst>
+                                            <p:cond delay="499"/>
+                                          </p:stCondLst>
+                                        </p:cTn>
+                                        <p:tgtEl>
+                                          <p:spTgt spid="4">
+                                            <p:txEl>
+                                              <p:pRg st="1" end="1"/>
+                                            </p:txEl>
+                                          </p:spTgt>
+                                        </p:tgtEl>
+                                        <p:attrNameLst>
+                                          <p:attrName>style.visibility</p:attrName>
+                                        </p:attrNameLst>
+                                      </p:cBhvr>
+                                      <p:to>
+                                        <p:strVal val="hidden"/>
+                                      </p:to>
+                                    </p:set>
+                                  </p:childTnLst>
+                                </p:cTn>
+                              </p:par>
+                            </p:childTnLst>
+                          </p:cTn>
+                        </p:par>
+                      </p:childTnLst>
+                    </p:cTn>
+                  </p:par>
+                  <p:par>
+                    <p:cTn id="35" fill="hold">
+                      <p:stCondLst>
+                        <p:cond delay="indefinite"/>
+                      </p:stCondLst>
+                      <p:childTnLst>
+                        <p:par>
+                          <p:cTn id="36" fill="hold">
+                            <p:stCondLst>
+                              <p:cond delay="0"/>
+                            </p:stCondLst>
+                            <p:childTnLst>
+                              <p:par>
+                                <p:cTn id="37" presetID="14" presetClass="exit" presetSubtype="10" fill="hold" grpId="1" nodeType="clickEffect">
+                                  <p:stCondLst>
+                                    <p:cond delay="0"/>
+                                  </p:stCondLst>
+                                  <p:childTnLst>
+                                    <p:animEffect transition="out" filter="randombar(horizontal)">
+                                      <p:cBhvr>
+                                        <p:cTn id="38" dur="500"/>
+                                        <p:tgtEl>
+                                          <p:spTgt spid="4">
+                                            <p:txEl>
+                                              <p:pRg st="2" end="2"/>
+                                            </p:txEl>
+                                          </p:spTgt>
+                                        </p:tgtEl>
+                                      </p:cBhvr>
+                                    </p:animEffect>
+                                    <p:set>
+                                      <p:cBhvr>
+                                        <p:cTn id="39" dur="1" fill="hold">
+                                          <p:stCondLst>
+                                            <p:cond delay="499"/>
+                                          </p:stCondLst>
+                                        </p:cTn>
+                                        <p:tgtEl>
+                                          <p:spTgt spid="4">
+                                            <p:txEl>
+                                              <p:pRg st="2" end="2"/>
+                                            </p:txEl>
+                                          </p:spTgt>
+                                        </p:tgtEl>
+                                        <p:attrNameLst>
+                                          <p:attrName>style.visibility</p:attrName>
+                                        </p:attrNameLst>
+                                      </p:cBhvr>
+                                      <p:to>
+                                        <p:strVal val="hidden"/>
+                                      </p:to>
+                                    </p:set>
+                                  </p:childTnLst>
+                                </p:cTn>
+                              </p:par>
+                            </p:childTnLst>
+                          </p:cTn>
+                        </p:par>
+                      </p:childTnLst>
+                    </p:cTn>
+                  </p:par>
+                  <p:par>
+                    <p:cTn id="40" fill="hold">
+                      <p:stCondLst>
+                        <p:cond delay="indefinite"/>
+                      </p:stCondLst>
+                      <p:childTnLst>
+                        <p:par>
+                          <p:cTn id="41" fill="hold">
+                            <p:stCondLst>
+                              <p:cond delay="0"/>
+                            </p:stCondLst>
+                            <p:childTnLst>
+                              <p:par>
+                                <p:cTn id="42" presetID="22" presetClass="entr" presetSubtype="4" fill="hold" nodeType="clickEffect">
+                                  <p:stCondLst>
+                                    <p:cond delay="0"/>
+                                  </p:stCondLst>
+                                  <p:childTnLst>
+                                    <p:set>
+                                      <p:cBhvr>
+                                        <p:cTn id="43" dur="1" fill="hold">
+                                          <p:stCondLst>
+                                            <p:cond delay="0"/>
+                                          </p:stCondLst>
+                                        </p:cTn>
+                                        <p:tgtEl>
+                                          <p:spTgt spid="6"/>
+                                        </p:tgtEl>
+                                        <p:attrNameLst>
+                                          <p:attrName>style.visibility</p:attrName>
+                                        </p:attrNameLst>
+                                      </p:cBhvr>
+                                      <p:to>
+                                        <p:strVal val="visible"/>
+                                      </p:to>
+                                    </p:set>
+                                    <p:animEffect transition="in" filter="wipe(down)">
+                                      <p:cBhvr>
+                                        <p:cTn id="44" dur="500"/>
+                                        <p:tgtEl>
+                                          <p:spTgt spid="6"/>
+                                        </p:tgtEl>
+                                      </p:cBhvr>
+                                    </p:animEffect>
+                                  </p:childTnLst>
+                                </p:cTn>
+                              </p:par>
+                            </p:childTnLst>
+                          </p:cTn>
+                        </p:par>
+                      </p:childTnLst>
+                    </p:cTn>
+                  </p:par>
+                  <p:par>
+                    <p:cTn id="45" fill="hold">
+                      <p:stCondLst>
+                        <p:cond delay="indefinite"/>
+                      </p:stCondLst>
+                      <p:childTnLst>
+                        <p:par>
+                          <p:cTn id="46" fill="hold">
+                            <p:stCondLst>
+                              <p:cond delay="0"/>
+                            </p:stCondLst>
+                            <p:childTnLst>
+                              <p:par>
+                                <p:cTn id="47" presetID="22" presetClass="entr" presetSubtype="4" fill="hold" nodeType="clickEffect">
+                                  <p:stCondLst>
+                                    <p:cond delay="0"/>
+                                  </p:stCondLst>
+                                  <p:childTnLst>
+                                    <p:set>
+                                      <p:cBhvr>
+                                        <p:cTn id="48" dur="1" fill="hold">
+                                          <p:stCondLst>
+                                            <p:cond delay="0"/>
+                                          </p:stCondLst>
+                                        </p:cTn>
+                                        <p:tgtEl>
+                                          <p:spTgt spid="11"/>
+                                        </p:tgtEl>
+                                        <p:attrNameLst>
+                                          <p:attrName>style.visibility</p:attrName>
+                                        </p:attrNameLst>
+                                      </p:cBhvr>
+                                      <p:to>
+                                        <p:strVal val="visible"/>
+                                      </p:to>
+                                    </p:set>
+                                    <p:animEffect transition="in" filter="wipe(down)">
+                                      <p:cBhvr>
+                                        <p:cTn id="49" dur="500"/>
+                                        <p:tgtEl>
+                                          <p:spTgt spid="11"/>
+                                        </p:tgtEl>
+                                      </p:cBhvr>
+                                    </p:animEffect>
+                                  </p:childTnLst>
+                                </p:cTn>
+                              </p:par>
+                            </p:childTnLst>
+                          </p:cTn>
+                        </p:par>
+                      </p:childTnLst>
+                    </p:cTn>
+                  </p:par>
+                  <p:par>
+                    <p:cTn id="50" fill="hold">
+                      <p:stCondLst>
+                        <p:cond delay="indefinite"/>
+                      </p:stCondLst>
+                      <p:childTnLst>
+                        <p:par>
+                          <p:cTn id="51" fill="hold">
+                            <p:stCondLst>
+                              <p:cond delay="0"/>
+                            </p:stCondLst>
+                            <p:childTnLst>
+                              <p:par>
+                                <p:cTn id="52" presetID="22" presetClass="entr" presetSubtype="4" fill="hold" nodeType="clickEffect">
+                                  <p:stCondLst>
+                                    <p:cond delay="0"/>
+                                  </p:stCondLst>
+                                  <p:childTnLst>
+                                    <p:set>
+                                      <p:cBhvr>
+                                        <p:cTn id="53" dur="1" fill="hold">
+                                          <p:stCondLst>
+                                            <p:cond delay="0"/>
+                                          </p:stCondLst>
+                                        </p:cTn>
+                                        <p:tgtEl>
+                                          <p:spTgt spid="9"/>
+                                        </p:tgtEl>
+                                        <p:attrNameLst>
+                                          <p:attrName>style.visibility</p:attrName>
+                                        </p:attrNameLst>
+                                      </p:cBhvr>
+                                      <p:to>
+                                        <p:strVal val="visible"/>
+                                      </p:to>
+                                    </p:set>
+                                    <p:animEffect transition="in" filter="wipe(down)">
+                                      <p:cBhvr>
+                                        <p:cTn id="54" dur="500"/>
+                                        <p:tgtEl>
+                                          <p:spTgt spid="9"/>
+                                        </p:tgtEl>
+                                      </p:cBhvr>
+                                    </p:animEffect>
+                                  </p:childTnLst>
+                                </p:cTn>
+                              </p:par>
+                            </p:childTnLst>
+                          </p:cTn>
+                        </p:par>
+                      </p:childTnLst>
+                    </p:cTn>
+                  </p:par>
+                  <p:par>
+                    <p:cTn id="55" fill="hold">
+                      <p:stCondLst>
+                        <p:cond delay="indefinite"/>
+                      </p:stCondLst>
+                      <p:childTnLst>
+                        <p:par>
+                          <p:cTn id="56" fill="hold">
+                            <p:stCondLst>
+                              <p:cond delay="0"/>
+                            </p:stCondLst>
+                            <p:childTnLst>
+                              <p:par>
+                                <p:cTn id="57" presetID="22" presetClass="entr" presetSubtype="4" fill="hold" nodeType="clickEffect">
+                                  <p:stCondLst>
+                                    <p:cond delay="0"/>
+                                  </p:stCondLst>
+                                  <p:childTnLst>
+                                    <p:set>
+                                      <p:cBhvr>
+                                        <p:cTn id="58" dur="1" fill="hold">
+                                          <p:stCondLst>
+                                            <p:cond delay="0"/>
+                                          </p:stCondLst>
+                                        </p:cTn>
+                                        <p:tgtEl>
+                                          <p:spTgt spid="12"/>
+                                        </p:tgtEl>
+                                        <p:attrNameLst>
+                                          <p:attrName>style.visibility</p:attrName>
+                                        </p:attrNameLst>
+                                      </p:cBhvr>
+                                      <p:to>
+                                        <p:strVal val="visible"/>
+                                      </p:to>
+                                    </p:set>
+                                    <p:animEffect transition="in" filter="wipe(down)">
+                                      <p:cBhvr>
+                                        <p:cTn id="59" dur="500"/>
+                                        <p:tgtEl>
+                                          <p:spTgt spid="12"/>
+                                        </p:tgtEl>
+                                      </p:cBhvr>
+                                    </p:animEffect>
+                                  </p:childTnLst>
+                                </p:cTn>
+                              </p:par>
+                            </p:childTnLst>
+                          </p:cTn>
+                        </p:par>
+                      </p:childTnLst>
+                    </p:cTn>
+                  </p:par>
+                  <p:par>
+                    <p:cTn id="60" fill="hold">
+                      <p:stCondLst>
+                        <p:cond delay="indefinite"/>
+                      </p:stCondLst>
+                      <p:childTnLst>
+                        <p:par>
+                          <p:cTn id="61" fill="hold">
+                            <p:stCondLst>
+                              <p:cond delay="0"/>
+                            </p:stCondLst>
+                            <p:childTnLst>
+                              <p:par>
+                                <p:cTn id="62" presetID="22" presetClass="entr" presetSubtype="4" fill="hold" nodeType="clickEffect">
+                                  <p:stCondLst>
+                                    <p:cond delay="0"/>
+                                  </p:stCondLst>
+                                  <p:childTnLst>
+                                    <p:set>
+                                      <p:cBhvr>
+                                        <p:cTn id="63" dur="1" fill="hold">
+                                          <p:stCondLst>
+                                            <p:cond delay="0"/>
+                                          </p:stCondLst>
+                                        </p:cTn>
+                                        <p:tgtEl>
+                                          <p:spTgt spid="14"/>
+                                        </p:tgtEl>
+                                        <p:attrNameLst>
+                                          <p:attrName>style.visibility</p:attrName>
+                                        </p:attrNameLst>
+                                      </p:cBhvr>
+                                      <p:to>
+                                        <p:strVal val="visible"/>
+                                      </p:to>
+                                    </p:set>
+                                    <p:animEffect transition="in" filter="wipe(down)">
+                                      <p:cBhvr>
+                                        <p:cTn id="64" dur="500"/>
+                                        <p:tgtEl>
+                                          <p:spTgt spid="14"/>
+                                        </p:tgtEl>
+                                      </p:cBhvr>
+                                    </p:animEffect>
+                                  </p:childTnLst>
+                                </p:cTn>
+                              </p:par>
+                            </p:childTnLst>
+                          </p:cTn>
+                        </p:par>
+                      </p:childTnLst>
+                    </p:cTn>
+                  </p:par>
+                </p:childTnLst>
+              </p:cTn>
+              <p:prevCondLst>
+                <p:cond evt="onPrev" delay="0">
+                  <p:tgtEl>
+                    <p:sldTgt/>
+                  </p:tgtEl>
+                </p:cond>
+              </p:prevCondLst>
+              <p:nextCondLst>
+                <p:cond evt="onNext" delay="0">
+                  <p:tgtEl>
+                    <p:sldTgt/>
+                  </p:tgtEl>
+                </p:cond>
+              </p:nextCondLst>
+            </p:seq>
+          </p:childTnLst>
+        </p:cTn>
+      </p:par>
+    </p:tnLst>
+    <p:bldLst>
+      <p:bldP spid="4" grpId="0" build="p"/>
+      <p:bldP spid="4" grpId="1" build="p"/>
+    </p:bldLst>
+  </p:timing>
+</p:sld>
+</file>
+
+<file path=ppt/slides/slide8.xml><?xml version="1.0" encoding="utf-8"?>
+<p:sld xmlns:a="http://schemas.openxmlformats.org/drawingml/2006/main" xmlns:r="http://schemas.openxmlformats.org/officeDocument/2006/relationships" xmlns:p="http://schemas.openxmlformats.org/presentationml/2006/main">
+  <p:cSld>
+    <p:spTree>
+      <p:nvGrpSpPr>
+        <p:cNvPr id="1" name=""/>
+        <p:cNvGrpSpPr/>
+        <p:nvPr/>
+      </p:nvGrpSpPr>
+      <p:grpSpPr>
+        <a:xfrm>
+          <a:off x="0" y="0"/>
+          <a:ext cx="0" cy="0"/>
+          <a:chOff x="0" y="0"/>
+          <a:chExt cx="0" cy="0"/>
+        </a:xfrm>
+      </p:grpSpPr>
+      <p:sp>
+        <p:nvSpPr>
+          <p:cNvPr id="2" name="Titel 1">
+            <a:extLst>
+              <a:ext uri="{FF2B5EF4-FFF2-40B4-BE49-F238E27FC236}">
+                <a16:creationId xmlns:a16="http://schemas.microsoft.com/office/drawing/2014/main" id="{A4620AAD-13C5-62FD-E168-21568D826509}"/>
+              </a:ext>
+            </a:extLst>
+          </p:cNvPr>
+          <p:cNvSpPr>
+            <a:spLocks noGrp="1"/>
+          </p:cNvSpPr>
+          <p:nvPr>
+            <p:ph type="title"/>
+          </p:nvPr>
+        </p:nvSpPr>
+        <p:spPr/>
+        <p:txBody>
+          <a:bodyPr/>
+          <a:lstStyle/>
+          <a:p>
+            <a:r>
+              <a:rPr lang="de-DE" dirty="0"/>
+              <a:t>Daten einfugen</a:t>
+            </a:r>
+          </a:p>
+        </p:txBody>
+      </p:sp>
+      <p:pic>
+        <p:nvPicPr>
+          <p:cNvPr id="10" name="Grafik 9">
+            <a:extLst>
+              <a:ext uri="{FF2B5EF4-FFF2-40B4-BE49-F238E27FC236}">
+                <a16:creationId xmlns:a16="http://schemas.microsoft.com/office/drawing/2014/main" id="{42EAF0FB-6F2C-596C-AEA2-42ABE9EA5D8E}"/>
+              </a:ext>
+            </a:extLst>
+          </p:cNvPr>
+          <p:cNvPicPr>
+            <a:picLocks noChangeAspect="1"/>
+          </p:cNvPicPr>
+          <p:nvPr/>
+        </p:nvPicPr>
+        <p:blipFill>
+          <a:blip r:embed="rId2"/>
+          <a:stretch>
+            <a:fillRect/>
+          </a:stretch>
+        </p:blipFill>
+        <p:spPr>
+          <a:xfrm>
+            <a:off x="598947" y="1880502"/>
+            <a:ext cx="5063001" cy="3663772"/>
+          </a:xfrm>
+          <a:prstGeom prst="rect">
+            <a:avLst/>
+          </a:prstGeom>
+        </p:spPr>
+      </p:pic>
+      <p:pic>
+        <p:nvPicPr>
+          <p:cNvPr id="12" name="Grafik 11">
+            <a:extLst>
+              <a:ext uri="{FF2B5EF4-FFF2-40B4-BE49-F238E27FC236}">
+                <a16:creationId xmlns:a16="http://schemas.microsoft.com/office/drawing/2014/main" id="{A6B1D3DE-42B2-89FC-6DE4-D6129FFF0CB5}"/>
+              </a:ext>
+            </a:extLst>
+          </p:cNvPr>
+          <p:cNvPicPr>
+            <a:picLocks noChangeAspect="1"/>
+          </p:cNvPicPr>
+          <p:nvPr/>
+        </p:nvPicPr>
+        <p:blipFill>
+          <a:blip r:embed="rId3"/>
+          <a:stretch>
+            <a:fillRect/>
+          </a:stretch>
+        </p:blipFill>
+        <p:spPr>
+          <a:xfrm>
+            <a:off x="6005734" y="666364"/>
+            <a:ext cx="5482268" cy="5549241"/>
+          </a:xfrm>
+          <a:prstGeom prst="rect">
+            <a:avLst/>
+          </a:prstGeom>
+        </p:spPr>
+      </p:pic>
+      <p:pic>
+        <p:nvPicPr>
+          <p:cNvPr id="15" name="Grafik 14">
+            <a:extLst>
+              <a:ext uri="{FF2B5EF4-FFF2-40B4-BE49-F238E27FC236}">
+                <a16:creationId xmlns:a16="http://schemas.microsoft.com/office/drawing/2014/main" id="{96EFE1FD-F970-E17A-2803-A216AB4E07F0}"/>
+              </a:ext>
+            </a:extLst>
+          </p:cNvPr>
+          <p:cNvPicPr>
+            <a:picLocks noChangeAspect="1"/>
+          </p:cNvPicPr>
+          <p:nvPr/>
+        </p:nvPicPr>
+        <p:blipFill>
+          <a:blip r:embed="rId4"/>
+          <a:stretch>
+            <a:fillRect/>
+          </a:stretch>
+        </p:blipFill>
+        <p:spPr>
+          <a:xfrm>
+            <a:off x="1149680" y="1968237"/>
+            <a:ext cx="2762636" cy="3477110"/>
+          </a:xfrm>
+          <a:prstGeom prst="rect">
+            <a:avLst/>
+          </a:prstGeom>
+        </p:spPr>
+      </p:pic>
+      <p:sp>
+        <p:nvSpPr>
+          <p:cNvPr id="16" name="Textfeld 15">
+            <a:extLst>
+              <a:ext uri="{FF2B5EF4-FFF2-40B4-BE49-F238E27FC236}">
+                <a16:creationId xmlns:a16="http://schemas.microsoft.com/office/drawing/2014/main" id="{EC16A758-B3F3-71C2-6675-9B0522D9630D}"/>
+              </a:ext>
+            </a:extLst>
+          </p:cNvPr>
+          <p:cNvSpPr txBox="1"/>
+          <p:nvPr/>
+        </p:nvSpPr>
+        <p:spPr>
+          <a:xfrm>
+            <a:off x="5413248" y="879676"/>
+            <a:ext cx="1723357" cy="584775"/>
+          </a:xfrm>
+          <a:prstGeom prst="rect">
+            <a:avLst/>
+          </a:prstGeom>
+          <a:noFill/>
+        </p:spPr>
+        <p:txBody>
+          <a:bodyPr wrap="none" rtlCol="0">
+            <a:spAutoFit/>
+          </a:bodyPr>
+          <a:lstStyle/>
+          <a:p>
+            <a:r>
+              <a:rPr lang="de-DE" sz="3200" dirty="0"/>
+              <a:t>Probleme</a:t>
+            </a:r>
+            <a:endParaRPr lang="de-DE" dirty="0"/>
+          </a:p>
+        </p:txBody>
+      </p:sp>
+      <p:sp>
+        <p:nvSpPr>
+          <p:cNvPr id="17" name="Textfeld 16">
+            <a:extLst>
+              <a:ext uri="{FF2B5EF4-FFF2-40B4-BE49-F238E27FC236}">
+                <a16:creationId xmlns:a16="http://schemas.microsoft.com/office/drawing/2014/main" id="{F5C63C5E-0C21-01E1-3DAF-7EC16205F99D}"/>
+              </a:ext>
+            </a:extLst>
+          </p:cNvPr>
+          <p:cNvSpPr txBox="1"/>
+          <p:nvPr/>
+        </p:nvSpPr>
+        <p:spPr>
+          <a:xfrm>
+            <a:off x="5413248" y="2320211"/>
+            <a:ext cx="4511941" cy="830997"/>
+          </a:xfrm>
+          <a:prstGeom prst="rect">
+            <a:avLst/>
+          </a:prstGeom>
+          <a:noFill/>
+        </p:spPr>
+        <p:txBody>
+          <a:bodyPr wrap="none" rtlCol="0">
+            <a:spAutoFit/>
+          </a:bodyPr>
+          <a:lstStyle/>
+          <a:p>
+            <a:r>
+              <a:rPr lang="de-DE" sz="2400" dirty="0"/>
+              <a:t>Keine Kunde kann 2mal </a:t>
+            </a:r>
+          </a:p>
+          <a:p>
+            <a:r>
+              <a:rPr lang="de-DE" sz="2400" dirty="0"/>
+              <a:t>am Tag das gleiche Produkt kaufen</a:t>
+            </a:r>
+          </a:p>
+        </p:txBody>
+      </p:sp>
+      <p:sp>
+        <p:nvSpPr>
+          <p:cNvPr id="18" name="Textfeld 17">
+            <a:extLst>
+              <a:ext uri="{FF2B5EF4-FFF2-40B4-BE49-F238E27FC236}">
+                <a16:creationId xmlns:a16="http://schemas.microsoft.com/office/drawing/2014/main" id="{59ADE203-C801-4EB9-3A5A-15D7B0A4E863}"/>
+              </a:ext>
+            </a:extLst>
+          </p:cNvPr>
+          <p:cNvSpPr txBox="1"/>
+          <p:nvPr/>
+        </p:nvSpPr>
+        <p:spPr>
+          <a:xfrm>
+            <a:off x="5413248" y="3706792"/>
+            <a:ext cx="3783985" cy="830997"/>
+          </a:xfrm>
+          <a:prstGeom prst="rect">
+            <a:avLst/>
+          </a:prstGeom>
+          <a:noFill/>
+        </p:spPr>
+        <p:txBody>
+          <a:bodyPr wrap="none" rtlCol="0">
+            <a:spAutoFit/>
+          </a:bodyPr>
+          <a:lstStyle/>
+          <a:p>
+            <a:r>
+              <a:rPr lang="de-DE" sz="2400" dirty="0"/>
+              <a:t>Beim Preiswechsel, </a:t>
+            </a:r>
+          </a:p>
+          <a:p>
+            <a:r>
+              <a:rPr lang="de-DE" sz="2400" dirty="0"/>
+              <a:t>stimmt unser Archiv nicht </a:t>
+            </a:r>
+            <a:r>
+              <a:rPr lang="de-DE" sz="2400" dirty="0" err="1"/>
+              <a:t>meht</a:t>
+            </a:r>
+            <a:endParaRPr lang="de-DE" sz="2400" dirty="0"/>
+          </a:p>
+        </p:txBody>
+      </p:sp>
+    </p:spTree>
+    <p:extLst>
+      <p:ext uri="{BB962C8B-B14F-4D97-AF65-F5344CB8AC3E}">
+        <p14:creationId xmlns:p14="http://schemas.microsoft.com/office/powerpoint/2010/main" val="909906794"/>
+      </p:ext>
+    </p:extLst>
+  </p:cSld>
+  <p:clrMapOvr>
+    <a:masterClrMapping/>
+  </p:clrMapOvr>
+  <p:timing>
+    <p:tnLst>
+      <p:par>
+        <p:cTn id="1" dur="indefinite" restart="never" nodeType="tmRoot">
+          <p:childTnLst>
+            <p:seq concurrent="1" nextAc="seek">
+              <p:cTn id="2" dur="indefinite" nodeType="mainSeq">
+                <p:childTnLst>
+                  <p:par>
+                    <p:cTn id="3" fill="hold">
+                      <p:stCondLst>
+                        <p:cond delay="indefinite"/>
+                      </p:stCondLst>
+                      <p:childTnLst>
+                        <p:par>
+                          <p:cTn id="4" fill="hold">
+                            <p:stCondLst>
+                              <p:cond delay="0"/>
+                            </p:stCondLst>
+                            <p:childTnLst>
+                              <p:par>
+                                <p:cTn id="5" presetID="22" presetClass="entr" presetSubtype="8" fill="hold" nodeType="clickEffect">
+                                  <p:stCondLst>
+                                    <p:cond delay="0"/>
+                                  </p:stCondLst>
+                                  <p:childTnLst>
+                                    <p:set>
+                                      <p:cBhvr>
+                                        <p:cTn id="6" dur="1" fill="hold">
+                                          <p:stCondLst>
+                                            <p:cond delay="0"/>
+                                          </p:stCondLst>
+                                        </p:cTn>
+                                        <p:tgtEl>
+                                          <p:spTgt spid="10"/>
+                                        </p:tgtEl>
+                                        <p:attrNameLst>
+                                          <p:attrName>style.visibility</p:attrName>
+                                        </p:attrNameLst>
+                                      </p:cBhvr>
+                                      <p:to>
+                                        <p:strVal val="visible"/>
+                                      </p:to>
+                                    </p:set>
+                                    <p:animEffect transition="in" filter="wipe(left)">
+                                      <p:cBhvr>
+                                        <p:cTn id="7" dur="2000"/>
+                                        <p:tgtEl>
+                                          <p:spTgt spid="10"/>
+                                        </p:tgtEl>
+                                      </p:cBhvr>
+                                    </p:animEffect>
+                                  </p:childTnLst>
+                                </p:cTn>
+                              </p:par>
+                            </p:childTnLst>
+                          </p:cTn>
+                        </p:par>
+                      </p:childTnLst>
+                    </p:cTn>
+                  </p:par>
+                  <p:par>
+                    <p:cTn id="8" fill="hold">
+                      <p:stCondLst>
+                        <p:cond delay="indefinite"/>
+                      </p:stCondLst>
+                      <p:childTnLst>
+                        <p:par>
+                          <p:cTn id="9" fill="hold">
+                            <p:stCondLst>
+                              <p:cond delay="0"/>
+                            </p:stCondLst>
+                            <p:childTnLst>
+                              <p:par>
+                                <p:cTn id="10" presetID="22" presetClass="entr" presetSubtype="8" fill="hold" nodeType="clickEffect">
+                                  <p:stCondLst>
+                                    <p:cond delay="0"/>
+                                  </p:stCondLst>
+                                  <p:childTnLst>
+                                    <p:set>
+                                      <p:cBhvr>
+                                        <p:cTn id="11" dur="1" fill="hold">
+                                          <p:stCondLst>
+                                            <p:cond delay="0"/>
+                                          </p:stCondLst>
+                                        </p:cTn>
+                                        <p:tgtEl>
+                                          <p:spTgt spid="12"/>
+                                        </p:tgtEl>
+                                        <p:attrNameLst>
+                                          <p:attrName>style.visibility</p:attrName>
+                                        </p:attrNameLst>
+                                      </p:cBhvr>
+                                      <p:to>
+                                        <p:strVal val="visible"/>
+                                      </p:to>
+                                    </p:set>
+                                    <p:animEffect transition="in" filter="wipe(left)">
+                                      <p:cBhvr>
+                                        <p:cTn id="12" dur="2000"/>
+                                        <p:tgtEl>
+                                          <p:spTgt spid="12"/>
+                                        </p:tgtEl>
+                                      </p:cBhvr>
+                                    </p:animEffect>
+                                  </p:childTnLst>
+                                </p:cTn>
+                              </p:par>
+                            </p:childTnLst>
+                          </p:cTn>
+                        </p:par>
+                      </p:childTnLst>
+                    </p:cTn>
+                  </p:par>
+                  <p:par>
+                    <p:cTn id="13" fill="hold">
+                      <p:stCondLst>
+                        <p:cond delay="indefinite"/>
+                      </p:stCondLst>
+                      <p:childTnLst>
+                        <p:par>
+                          <p:cTn id="14" fill="hold">
+                            <p:stCondLst>
+                              <p:cond delay="0"/>
+                            </p:stCondLst>
+                            <p:childTnLst>
+                              <p:par>
+                                <p:cTn id="15" presetID="14" presetClass="exit" presetSubtype="10" fill="hold" nodeType="clickEffect">
+                                  <p:stCondLst>
+                                    <p:cond delay="0"/>
+                                  </p:stCondLst>
+                                  <p:childTnLst>
+                                    <p:animEffect transition="out" filter="randombar(horizontal)">
+                                      <p:cBhvr>
+                                        <p:cTn id="16" dur="1000"/>
+                                        <p:tgtEl>
+                                          <p:spTgt spid="10"/>
+                                        </p:tgtEl>
+                                      </p:cBhvr>
+                                    </p:animEffect>
+                                    <p:set>
+                                      <p:cBhvr>
+                                        <p:cTn id="17" dur="1" fill="hold">
+                                          <p:stCondLst>
+                                            <p:cond delay="999"/>
+                                          </p:stCondLst>
+                                        </p:cTn>
+                                        <p:tgtEl>
+                                          <p:spTgt spid="10"/>
+                                        </p:tgtEl>
+                                        <p:attrNameLst>
+                                          <p:attrName>style.visibility</p:attrName>
+                                        </p:attrNameLst>
+                                      </p:cBhvr>
+                                      <p:to>
+                                        <p:strVal val="hidden"/>
+                                      </p:to>
+                                    </p:set>
+                                  </p:childTnLst>
+                                </p:cTn>
+                              </p:par>
+                              <p:par>
+                                <p:cTn id="18" presetID="14" presetClass="exit" presetSubtype="10" fill="hold" nodeType="withEffect">
+                                  <p:stCondLst>
+                                    <p:cond delay="0"/>
+                                  </p:stCondLst>
+                                  <p:childTnLst>
+                                    <p:animEffect transition="out" filter="randombar(horizontal)">
+                                      <p:cBhvr>
+                                        <p:cTn id="19" dur="1000"/>
+                                        <p:tgtEl>
+                                          <p:spTgt spid="12"/>
+                                        </p:tgtEl>
+                                      </p:cBhvr>
+                                    </p:animEffect>
+                                    <p:set>
+                                      <p:cBhvr>
+                                        <p:cTn id="20" dur="1" fill="hold">
+                                          <p:stCondLst>
+                                            <p:cond delay="999"/>
+                                          </p:stCondLst>
+                                        </p:cTn>
+                                        <p:tgtEl>
+                                          <p:spTgt spid="12"/>
+                                        </p:tgtEl>
+                                        <p:attrNameLst>
+                                          <p:attrName>style.visibility</p:attrName>
+                                        </p:attrNameLst>
+                                      </p:cBhvr>
+                                      <p:to>
+                                        <p:strVal val="hidden"/>
+                                      </p:to>
+                                    </p:set>
+                                  </p:childTnLst>
+                                </p:cTn>
+                              </p:par>
+                            </p:childTnLst>
+                          </p:cTn>
+                        </p:par>
+                      </p:childTnLst>
+                    </p:cTn>
+                  </p:par>
+                  <p:par>
+                    <p:cTn id="21" fill="hold">
+                      <p:stCondLst>
+                        <p:cond delay="indefinite"/>
+                      </p:stCondLst>
+                      <p:childTnLst>
+                        <p:par>
+                          <p:cTn id="22" fill="hold">
+                            <p:stCondLst>
+                              <p:cond delay="0"/>
+                            </p:stCondLst>
+                            <p:childTnLst>
+                              <p:par>
+                                <p:cTn id="23" presetID="22" presetClass="entr" presetSubtype="8" fill="hold" nodeType="clickEffect">
+                                  <p:stCondLst>
+                                    <p:cond delay="0"/>
+                                  </p:stCondLst>
+                                  <p:childTnLst>
+                                    <p:set>
+                                      <p:cBhvr>
+                                        <p:cTn id="24" dur="1" fill="hold">
+                                          <p:stCondLst>
+                                            <p:cond delay="0"/>
+                                          </p:stCondLst>
+                                        </p:cTn>
+                                        <p:tgtEl>
+                                          <p:spTgt spid="15"/>
+                                        </p:tgtEl>
+                                        <p:attrNameLst>
+                                          <p:attrName>style.visibility</p:attrName>
+                                        </p:attrNameLst>
+                                      </p:cBhvr>
+                                      <p:to>
+                                        <p:strVal val="visible"/>
+                                      </p:to>
+                                    </p:set>
+                                    <p:animEffect transition="in" filter="wipe(left)">
+                                      <p:cBhvr>
+                                        <p:cTn id="25" dur="2000"/>
+                                        <p:tgtEl>
+                                          <p:spTgt spid="15"/>
+                                        </p:tgtEl>
+                                      </p:cBhvr>
+                                    </p:animEffect>
+                                  </p:childTnLst>
+                                </p:cTn>
+                              </p:par>
+                            </p:childTnLst>
+                          </p:cTn>
+                        </p:par>
+                      </p:childTnLst>
+                    </p:cTn>
+                  </p:par>
+                  <p:par>
+                    <p:cTn id="26" fill="hold">
+                      <p:stCondLst>
+                        <p:cond delay="indefinite"/>
+                      </p:stCondLst>
+                      <p:childTnLst>
+                        <p:par>
+                          <p:cTn id="27" fill="hold">
+                            <p:stCondLst>
+                              <p:cond delay="0"/>
+                            </p:stCondLst>
+                            <p:childTnLst>
+                              <p:par>
+                                <p:cTn id="28" presetID="53" presetClass="entr" presetSubtype="16" fill="hold" grpId="0" nodeType="clickEffect">
+                                  <p:stCondLst>
+                                    <p:cond delay="0"/>
+                                  </p:stCondLst>
+                                  <p:childTnLst>
+                                    <p:set>
+                                      <p:cBhvr>
+                                        <p:cTn id="29" dur="1" fill="hold">
+                                          <p:stCondLst>
+                                            <p:cond delay="0"/>
+                                          </p:stCondLst>
+                                        </p:cTn>
+                                        <p:tgtEl>
+                                          <p:spTgt spid="16">
+                                            <p:txEl>
+                                              <p:pRg st="0" end="0"/>
                                             </p:txEl>
                                           </p:spTgt>
                                         </p:tgtEl>
@@ -34835,13 +37454,275 @@
                                         <p:strVal val="visible"/>
                                       </p:to>
                                     </p:set>
-                                    <p:animEffect transition="in" filter="wipe(down)">
+                                    <p:anim calcmode="lin" valueType="num">
                                       <p:cBhvr>
-                                        <p:cTn id="19" dur="1000"/>
+                                        <p:cTn id="30" dur="500" fill="hold"/>
                                         <p:tgtEl>
-                                          <p:spTgt spid="4">
+                                          <p:spTgt spid="16">
                                             <p:txEl>
-                                              <p:pRg st="3" end="3"/>
+                                              <p:pRg st="0" end="0"/>
+                                            </p:txEl>
+                                          </p:spTgt>
+                                        </p:tgtEl>
+                                        <p:attrNameLst>
+                                          <p:attrName>ppt_w</p:attrName>
+                                        </p:attrNameLst>
+                                      </p:cBhvr>
+                                      <p:tavLst>
+                                        <p:tav tm="0">
+                                          <p:val>
+                                            <p:fltVal val="0"/>
+                                          </p:val>
+                                        </p:tav>
+                                        <p:tav tm="100000">
+                                          <p:val>
+                                            <p:strVal val="#ppt_w"/>
+                                          </p:val>
+                                        </p:tav>
+                                      </p:tavLst>
+                                    </p:anim>
+                                    <p:anim calcmode="lin" valueType="num">
+                                      <p:cBhvr>
+                                        <p:cTn id="31" dur="500" fill="hold"/>
+                                        <p:tgtEl>
+                                          <p:spTgt spid="16">
+                                            <p:txEl>
+                                              <p:pRg st="0" end="0"/>
+                                            </p:txEl>
+                                          </p:spTgt>
+                                        </p:tgtEl>
+                                        <p:attrNameLst>
+                                          <p:attrName>ppt_h</p:attrName>
+                                        </p:attrNameLst>
+                                      </p:cBhvr>
+                                      <p:tavLst>
+                                        <p:tav tm="0">
+                                          <p:val>
+                                            <p:fltVal val="0"/>
+                                          </p:val>
+                                        </p:tav>
+                                        <p:tav tm="100000">
+                                          <p:val>
+                                            <p:strVal val="#ppt_h"/>
+                                          </p:val>
+                                        </p:tav>
+                                      </p:tavLst>
+                                    </p:anim>
+                                    <p:animEffect transition="in" filter="fade">
+                                      <p:cBhvr>
+                                        <p:cTn id="32" dur="500"/>
+                                        <p:tgtEl>
+                                          <p:spTgt spid="16">
+                                            <p:txEl>
+                                              <p:pRg st="0" end="0"/>
+                                            </p:txEl>
+                                          </p:spTgt>
+                                        </p:tgtEl>
+                                      </p:cBhvr>
+                                    </p:animEffect>
+                                  </p:childTnLst>
+                                </p:cTn>
+                              </p:par>
+                            </p:childTnLst>
+                          </p:cTn>
+                        </p:par>
+                      </p:childTnLst>
+                    </p:cTn>
+                  </p:par>
+                  <p:par>
+                    <p:cTn id="33" fill="hold">
+                      <p:stCondLst>
+                        <p:cond delay="indefinite"/>
+                      </p:stCondLst>
+                      <p:childTnLst>
+                        <p:par>
+                          <p:cTn id="34" fill="hold">
+                            <p:stCondLst>
+                              <p:cond delay="0"/>
+                            </p:stCondLst>
+                            <p:childTnLst>
+                              <p:par>
+                                <p:cTn id="35" presetID="22" presetClass="entr" presetSubtype="8" fill="hold" grpId="0" nodeType="clickEffect">
+                                  <p:stCondLst>
+                                    <p:cond delay="0"/>
+                                  </p:stCondLst>
+                                  <p:childTnLst>
+                                    <p:set>
+                                      <p:cBhvr>
+                                        <p:cTn id="36" dur="1" fill="hold">
+                                          <p:stCondLst>
+                                            <p:cond delay="0"/>
+                                          </p:stCondLst>
+                                        </p:cTn>
+                                        <p:tgtEl>
+                                          <p:spTgt spid="17">
+                                            <p:txEl>
+                                              <p:pRg st="0" end="0"/>
+                                            </p:txEl>
+                                          </p:spTgt>
+                                        </p:tgtEl>
+                                        <p:attrNameLst>
+                                          <p:attrName>style.visibility</p:attrName>
+                                        </p:attrNameLst>
+                                      </p:cBhvr>
+                                      <p:to>
+                                        <p:strVal val="visible"/>
+                                      </p:to>
+                                    </p:set>
+                                    <p:animEffect transition="in" filter="wipe(left)">
+                                      <p:cBhvr>
+                                        <p:cTn id="37" dur="1000"/>
+                                        <p:tgtEl>
+                                          <p:spTgt spid="17">
+                                            <p:txEl>
+                                              <p:pRg st="0" end="0"/>
+                                            </p:txEl>
+                                          </p:spTgt>
+                                        </p:tgtEl>
+                                      </p:cBhvr>
+                                    </p:animEffect>
+                                  </p:childTnLst>
+                                </p:cTn>
+                              </p:par>
+                              <p:par>
+                                <p:cTn id="38" presetID="22" presetClass="entr" presetSubtype="8" fill="hold" grpId="0" nodeType="withEffect">
+                                  <p:stCondLst>
+                                    <p:cond delay="0"/>
+                                  </p:stCondLst>
+                                  <p:childTnLst>
+                                    <p:set>
+                                      <p:cBhvr>
+                                        <p:cTn id="39" dur="1" fill="hold">
+                                          <p:stCondLst>
+                                            <p:cond delay="0"/>
+                                          </p:stCondLst>
+                                        </p:cTn>
+                                        <p:tgtEl>
+                                          <p:spTgt spid="17">
+                                            <p:txEl>
+                                              <p:pRg st="1" end="1"/>
+                                            </p:txEl>
+                                          </p:spTgt>
+                                        </p:tgtEl>
+                                        <p:attrNameLst>
+                                          <p:attrName>style.visibility</p:attrName>
+                                        </p:attrNameLst>
+                                      </p:cBhvr>
+                                      <p:to>
+                                        <p:strVal val="visible"/>
+                                      </p:to>
+                                    </p:set>
+                                    <p:animEffect transition="in" filter="wipe(left)">
+                                      <p:cBhvr>
+                                        <p:cTn id="40" dur="1000"/>
+                                        <p:tgtEl>
+                                          <p:spTgt spid="17">
+                                            <p:txEl>
+                                              <p:pRg st="1" end="1"/>
+                                            </p:txEl>
+                                          </p:spTgt>
+                                        </p:tgtEl>
+                                      </p:cBhvr>
+                                    </p:animEffect>
+                                  </p:childTnLst>
+                                </p:cTn>
+                              </p:par>
+                            </p:childTnLst>
+                          </p:cTn>
+                        </p:par>
+                      </p:childTnLst>
+                    </p:cTn>
+                  </p:par>
+                  <p:par>
+                    <p:cTn id="41" fill="hold">
+                      <p:stCondLst>
+                        <p:cond delay="indefinite"/>
+                      </p:stCondLst>
+                      <p:childTnLst>
+                        <p:par>
+                          <p:cTn id="42" fill="hold">
+                            <p:stCondLst>
+                              <p:cond delay="0"/>
+                            </p:stCondLst>
+                            <p:childTnLst>
+                              <p:par>
+                                <p:cTn id="43" presetID="22" presetClass="entr" presetSubtype="8" fill="hold" grpId="0" nodeType="clickEffect">
+                                  <p:stCondLst>
+                                    <p:cond delay="0"/>
+                                  </p:stCondLst>
+                                  <p:childTnLst>
+                                    <p:set>
+                                      <p:cBhvr>
+                                        <p:cTn id="44" dur="1" fill="hold">
+                                          <p:stCondLst>
+                                            <p:cond delay="0"/>
+                                          </p:stCondLst>
+                                        </p:cTn>
+                                        <p:tgtEl>
+                                          <p:spTgt spid="18">
+                                            <p:txEl>
+                                              <p:pRg st="0" end="0"/>
+                                            </p:txEl>
+                                          </p:spTgt>
+                                        </p:tgtEl>
+                                        <p:attrNameLst>
+                                          <p:attrName>style.visibility</p:attrName>
+                                        </p:attrNameLst>
+                                      </p:cBhvr>
+                                      <p:to>
+                                        <p:strVal val="visible"/>
+                                      </p:to>
+                                    </p:set>
+                                    <p:animEffect transition="in" filter="wipe(left)">
+                                      <p:cBhvr>
+                                        <p:cTn id="45" dur="1000"/>
+                                        <p:tgtEl>
+                                          <p:spTgt spid="18">
+                                            <p:txEl>
+                                              <p:pRg st="0" end="0"/>
+                                            </p:txEl>
+                                          </p:spTgt>
+                                        </p:tgtEl>
+                                      </p:cBhvr>
+                                    </p:animEffect>
+                                  </p:childTnLst>
+                                </p:cTn>
+                              </p:par>
+                              <p:par>
+                                <p:cTn id="46" presetID="22" presetClass="entr" presetSubtype="8" fill="hold" grpId="0" nodeType="withEffect">
+                                  <p:stCondLst>
+                                    <p:cond delay="0"/>
+                                  </p:stCondLst>
+                                  <p:childTnLst>
+                                    <p:set>
+                                      <p:cBhvr>
+                                        <p:cTn id="47" dur="1" fill="hold">
+                                          <p:stCondLst>
+                                            <p:cond delay="0"/>
+                                          </p:stCondLst>
+                                        </p:cTn>
+                                        <p:tgtEl>
+                                          <p:spTgt spid="18">
+                                            <p:txEl>
+                                              <p:pRg st="1" end="1"/>
+                                            </p:txEl>
+                                          </p:spTgt>
+                                        </p:tgtEl>
+                                        <p:attrNameLst>
+                                          <p:attrName>style.visibility</p:attrName>
+                                        </p:attrNameLst>
+                                      </p:cBhvr>
+                                      <p:to>
+                                        <p:strVal val="visible"/>
+                                      </p:to>
+                                    </p:set>
+                                    <p:animEffect transition="in" filter="wipe(left)">
+                                      <p:cBhvr>
+                                        <p:cTn id="48" dur="1000"/>
+                                        <p:tgtEl>
+                                          <p:spTgt spid="18">
+                                            <p:txEl>
+                                              <p:pRg st="1" end="1"/>
                                             </p:txEl>
                                           </p:spTgt>
                                         </p:tgtEl>
@@ -34878,311 +37759,11 @@
       </p:par>
     </p:tnLst>
     <p:bldLst>
-      <p:bldP spid="2" grpId="0"/>
-      <p:bldP spid="4" grpId="0" build="p"/>
+      <p:bldP spid="16" grpId="0" build="allAtOnce"/>
+      <p:bldP spid="17" grpId="0" build="allAtOnce"/>
+      <p:bldP spid="18" grpId="0" build="allAtOnce"/>
     </p:bldLst>
   </p:timing>
-</p:sld>
-</file>
-
-<file path=ppt/slides/slide8.xml><?xml version="1.0" encoding="utf-8"?>
-<p:sld xmlns:a="http://schemas.openxmlformats.org/drawingml/2006/main" xmlns:r="http://schemas.openxmlformats.org/officeDocument/2006/relationships" xmlns:p="http://schemas.openxmlformats.org/presentationml/2006/main">
-  <p:cSld>
-    <p:spTree>
-      <p:nvGrpSpPr>
-        <p:cNvPr id="1" name=""/>
-        <p:cNvGrpSpPr/>
-        <p:nvPr/>
-      </p:nvGrpSpPr>
-      <p:grpSpPr>
-        <a:xfrm>
-          <a:off x="0" y="0"/>
-          <a:ext cx="0" cy="0"/>
-          <a:chOff x="0" y="0"/>
-          <a:chExt cx="0" cy="0"/>
-        </a:xfrm>
-      </p:grpSpPr>
-      <p:sp>
-        <p:nvSpPr>
-          <p:cNvPr id="2" name="Titel 1">
-            <a:extLst>
-              <a:ext uri="{FF2B5EF4-FFF2-40B4-BE49-F238E27FC236}">
-                <a16:creationId xmlns:a16="http://schemas.microsoft.com/office/drawing/2014/main" id="{B5C4EE4F-3B31-8628-A308-011FA7FD6C12}"/>
-              </a:ext>
-            </a:extLst>
-          </p:cNvPr>
-          <p:cNvSpPr>
-            <a:spLocks noGrp="1"/>
-          </p:cNvSpPr>
-          <p:nvPr>
-            <p:ph type="title"/>
-          </p:nvPr>
-        </p:nvSpPr>
-        <p:spPr>
-          <a:xfrm>
-            <a:off x="1024128" y="471509"/>
-            <a:ext cx="7581392" cy="1737360"/>
-          </a:xfrm>
-        </p:spPr>
-        <p:txBody>
-          <a:bodyPr/>
-          <a:lstStyle/>
-          <a:p>
-            <a:r>
-              <a:rPr lang="de-DE" dirty="0"/>
-              <a:t>Datenbank-Implementierung</a:t>
-            </a:r>
-          </a:p>
-        </p:txBody>
-      </p:sp>
-      <p:pic>
-        <p:nvPicPr>
-          <p:cNvPr id="6" name="Inhaltsplatzhalter 5">
-            <a:extLst>
-              <a:ext uri="{FF2B5EF4-FFF2-40B4-BE49-F238E27FC236}">
-                <a16:creationId xmlns:a16="http://schemas.microsoft.com/office/drawing/2014/main" id="{9DCD5902-E0B6-2F19-B3CD-5EA50AA11331}"/>
-              </a:ext>
-            </a:extLst>
-          </p:cNvPr>
-          <p:cNvPicPr>
-            <a:picLocks noGrp="1" noChangeAspect="1"/>
-          </p:cNvPicPr>
-          <p:nvPr>
-            <p:ph idx="1"/>
-          </p:nvPr>
-        </p:nvPicPr>
-        <p:blipFill>
-          <a:blip r:embed="rId2"/>
-          <a:stretch>
-            <a:fillRect/>
-          </a:stretch>
-        </p:blipFill>
-        <p:spPr>
-          <a:xfrm>
-            <a:off x="1024129" y="2342468"/>
-            <a:ext cx="5203952" cy="1579656"/>
-          </a:xfrm>
-          <a:prstGeom prst="rect">
-            <a:avLst/>
-          </a:prstGeom>
-        </p:spPr>
-      </p:pic>
-      <p:pic>
-        <p:nvPicPr>
-          <p:cNvPr id="8" name="Grafik 7">
-            <a:extLst>
-              <a:ext uri="{FF2B5EF4-FFF2-40B4-BE49-F238E27FC236}">
-                <a16:creationId xmlns:a16="http://schemas.microsoft.com/office/drawing/2014/main" id="{CA359531-9757-1CDB-65AF-5AF4E885185C}"/>
-              </a:ext>
-            </a:extLst>
-          </p:cNvPr>
-          <p:cNvPicPr>
-            <a:picLocks noChangeAspect="1"/>
-          </p:cNvPicPr>
-          <p:nvPr/>
-        </p:nvPicPr>
-        <p:blipFill>
-          <a:blip r:embed="rId3"/>
-          <a:stretch>
-            <a:fillRect/>
-          </a:stretch>
-        </p:blipFill>
-        <p:spPr>
-          <a:xfrm>
-            <a:off x="6096000" y="4131011"/>
-            <a:ext cx="5465096" cy="1973751"/>
-          </a:xfrm>
-          <a:prstGeom prst="rect">
-            <a:avLst/>
-          </a:prstGeom>
-        </p:spPr>
-      </p:pic>
-      <p:sp>
-        <p:nvSpPr>
-          <p:cNvPr id="11" name="Textfeld 10">
-            <a:extLst>
-              <a:ext uri="{FF2B5EF4-FFF2-40B4-BE49-F238E27FC236}">
-                <a16:creationId xmlns:a16="http://schemas.microsoft.com/office/drawing/2014/main" id="{67734543-B747-6EAE-5F79-1A969DF731B5}"/>
-              </a:ext>
-            </a:extLst>
-          </p:cNvPr>
-          <p:cNvSpPr txBox="1"/>
-          <p:nvPr/>
-        </p:nvSpPr>
-        <p:spPr>
-          <a:xfrm>
-            <a:off x="6553200" y="2342468"/>
-            <a:ext cx="4378960" cy="769441"/>
-          </a:xfrm>
-          <a:prstGeom prst="rect">
-            <a:avLst/>
-          </a:prstGeom>
-          <a:noFill/>
-        </p:spPr>
-        <p:txBody>
-          <a:bodyPr wrap="square" rtlCol="0">
-            <a:spAutoFit/>
-          </a:bodyPr>
-          <a:lstStyle/>
-          <a:p>
-            <a:r>
-              <a:rPr lang="de-DE" sz="1600" b="1" dirty="0"/>
-              <a:t>PRODUKT TABELLE MIT FREMDSCHLÜSSELN</a:t>
-            </a:r>
-          </a:p>
-          <a:p>
-            <a:r>
-              <a:rPr lang="de-DE" sz="1400" dirty="0"/>
-              <a:t>Verknüpft die Stammdaten (Kategorie &amp; Lieferant) über deklarierte Fremdschlüssel (Foreign Keys).</a:t>
-            </a:r>
-          </a:p>
-        </p:txBody>
-      </p:sp>
-      <p:cxnSp>
-        <p:nvCxnSpPr>
-          <p:cNvPr id="13" name="Gerade Verbindung mit Pfeil 12">
-            <a:extLst>
-              <a:ext uri="{FF2B5EF4-FFF2-40B4-BE49-F238E27FC236}">
-                <a16:creationId xmlns:a16="http://schemas.microsoft.com/office/drawing/2014/main" id="{590D330D-39C3-9ECD-60F1-FC64CD85080F}"/>
-              </a:ext>
-            </a:extLst>
-          </p:cNvPr>
-          <p:cNvCxnSpPr>
-            <a:cxnSpLocks/>
-          </p:cNvCxnSpPr>
-          <p:nvPr/>
-        </p:nvCxnSpPr>
-        <p:spPr>
-          <a:xfrm flipH="1">
-            <a:off x="5527040" y="2629185"/>
-            <a:ext cx="970280" cy="209016"/>
-          </a:xfrm>
-          <a:prstGeom prst="straightConnector1">
-            <a:avLst/>
-          </a:prstGeom>
-          <a:ln w="38100">
-            <a:tailEnd type="triangle"/>
-          </a:ln>
-        </p:spPr>
-        <p:style>
-          <a:lnRef idx="1">
-            <a:schemeClr val="accent1"/>
-          </a:lnRef>
-          <a:fillRef idx="0">
-            <a:schemeClr val="accent1"/>
-          </a:fillRef>
-          <a:effectRef idx="0">
-            <a:schemeClr val="accent1"/>
-          </a:effectRef>
-          <a:fontRef idx="minor">
-            <a:schemeClr val="tx1"/>
-          </a:fontRef>
-        </p:style>
-      </p:cxnSp>
-      <p:sp>
-        <p:nvSpPr>
-          <p:cNvPr id="15" name="Textfeld 14">
-            <a:extLst>
-              <a:ext uri="{FF2B5EF4-FFF2-40B4-BE49-F238E27FC236}">
-                <a16:creationId xmlns:a16="http://schemas.microsoft.com/office/drawing/2014/main" id="{BF44B819-2061-F84B-1899-096AB27F5522}"/>
-              </a:ext>
-            </a:extLst>
-          </p:cNvPr>
-          <p:cNvSpPr txBox="1"/>
-          <p:nvPr/>
-        </p:nvSpPr>
-        <p:spPr>
-          <a:xfrm>
-            <a:off x="822960" y="4226560"/>
-            <a:ext cx="5080000" cy="984885"/>
-          </a:xfrm>
-          <a:prstGeom prst="rect">
-            <a:avLst/>
-          </a:prstGeom>
-          <a:noFill/>
-        </p:spPr>
-        <p:txBody>
-          <a:bodyPr wrap="square" rtlCol="0">
-            <a:spAutoFit/>
-          </a:bodyPr>
-          <a:lstStyle/>
-          <a:p>
-            <a:r>
-              <a:rPr lang="de-DE" sz="1600" b="1" dirty="0"/>
-              <a:t>BESTELLTABELLE MIT VERBUNDSCHLÜSSEL</a:t>
-            </a:r>
-          </a:p>
-          <a:p>
-            <a:r>
-              <a:rPr lang="de-DE" sz="1400" dirty="0"/>
-              <a:t>Die Bestellungen verknüpfen Kunden und Produkte n:m. Ein zusammengesetzter Primärschlüssel (Verbundschlüssel) garantiert die Eindeutigkeit pro Tag.</a:t>
-            </a:r>
-          </a:p>
-        </p:txBody>
-      </p:sp>
-      <p:cxnSp>
-        <p:nvCxnSpPr>
-          <p:cNvPr id="16" name="Gerade Verbindung mit Pfeil 15">
-            <a:extLst>
-              <a:ext uri="{FF2B5EF4-FFF2-40B4-BE49-F238E27FC236}">
-                <a16:creationId xmlns:a16="http://schemas.microsoft.com/office/drawing/2014/main" id="{EB8B6C46-6C6B-54F2-FE4F-41506A98EC2A}"/>
-              </a:ext>
-            </a:extLst>
-          </p:cNvPr>
-          <p:cNvCxnSpPr>
-            <a:cxnSpLocks/>
-          </p:cNvCxnSpPr>
-          <p:nvPr/>
-        </p:nvCxnSpPr>
-        <p:spPr>
-          <a:xfrm>
-            <a:off x="4892040" y="4426288"/>
-            <a:ext cx="1120140" cy="233117"/>
-          </a:xfrm>
-          <a:prstGeom prst="straightConnector1">
-            <a:avLst/>
-          </a:prstGeom>
-          <a:ln w="38100">
-            <a:tailEnd type="triangle"/>
-          </a:ln>
-        </p:spPr>
-        <p:style>
-          <a:lnRef idx="1">
-            <a:schemeClr val="accent1"/>
-          </a:lnRef>
-          <a:fillRef idx="0">
-            <a:schemeClr val="accent1"/>
-          </a:fillRef>
-          <a:effectRef idx="0">
-            <a:schemeClr val="accent1"/>
-          </a:effectRef>
-          <a:fontRef idx="minor">
-            <a:schemeClr val="tx1"/>
-          </a:fontRef>
-        </p:style>
-      </p:cxnSp>
-    </p:spTree>
-    <p:extLst>
-      <p:ext uri="{BB962C8B-B14F-4D97-AF65-F5344CB8AC3E}">
-        <p14:creationId xmlns:p14="http://schemas.microsoft.com/office/powerpoint/2010/main" val="3080091930"/>
-      </p:ext>
-    </p:extLst>
-  </p:cSld>
-  <p:clrMapOvr>
-    <a:masterClrMapping/>
-  </p:clrMapOvr>
-  <mc:AlternateContent xmlns:mc="http://schemas.openxmlformats.org/markup-compatibility/2006" xmlns:p14="http://schemas.microsoft.com/office/powerpoint/2010/main">
-    <mc:Choice Requires="p14">
-      <p:transition spd="slow" p14:dur="800">
-        <p14:flythrough/>
-      </p:transition>
-    </mc:Choice>
-    <mc:Fallback xmlns="">
-      <p:transition spd="slow">
-        <p:fade/>
-      </p:transition>
-    </mc:Fallback>
-  </mc:AlternateContent>
 </p:sld>
 </file>
 
@@ -35208,7 +37789,7 @@
           <p:cNvPr id="2" name="Titel 1">
             <a:extLst>
               <a:ext uri="{FF2B5EF4-FFF2-40B4-BE49-F238E27FC236}">
-                <a16:creationId xmlns:a16="http://schemas.microsoft.com/office/drawing/2014/main" id="{1BCA5723-41A6-3F86-93CB-F5DBDA04C9B7}"/>
+                <a16:creationId xmlns:a16="http://schemas.microsoft.com/office/drawing/2014/main" id="{1F003AD2-1B88-440C-1422-D8A6B5A379B9}"/>
               </a:ext>
             </a:extLst>
           </p:cNvPr>
@@ -35219,40 +37800,114 @@
             <p:ph type="title"/>
           </p:nvPr>
         </p:nvSpPr>
+        <p:spPr/>
+        <p:txBody>
+          <a:bodyPr/>
+          <a:lstStyle/>
+          <a:p>
+            <a:r>
+              <a:rPr lang="de-DE" dirty="0"/>
+              <a:t>Lösungen</a:t>
+            </a:r>
+          </a:p>
+        </p:txBody>
+      </p:sp>
+      <p:sp>
+        <p:nvSpPr>
+          <p:cNvPr id="3" name="Inhaltsplatzhalter 2">
+            <a:extLst>
+              <a:ext uri="{FF2B5EF4-FFF2-40B4-BE49-F238E27FC236}">
+                <a16:creationId xmlns:a16="http://schemas.microsoft.com/office/drawing/2014/main" id="{60EF2280-D31A-5F41-EC92-E7DE3B133190}"/>
+              </a:ext>
+            </a:extLst>
+          </p:cNvPr>
+          <p:cNvSpPr>
+            <a:spLocks noGrp="1"/>
+          </p:cNvSpPr>
+          <p:nvPr>
+            <p:ph idx="1"/>
+          </p:nvPr>
+        </p:nvSpPr>
         <p:spPr>
           <a:xfrm>
-            <a:off x="1024128" y="585216"/>
-            <a:ext cx="9720072" cy="1499616"/>
+            <a:off x="5715000" y="4803494"/>
+            <a:ext cx="5859684" cy="1204114"/>
           </a:xfrm>
         </p:spPr>
         <p:txBody>
-          <a:bodyPr anchor="ctr">
+          <a:bodyPr>
             <a:normAutofit/>
           </a:bodyPr>
           <a:lstStyle/>
           <a:p>
             <a:r>
-              <a:rPr lang="de-DE" dirty="0"/>
-              <a:t>Komplexe SQL-Abfragen &amp; Tests</a:t>
+              <a:rPr lang="de-DE" sz="2000" dirty="0"/>
+              <a:t>Zum Glück, keine Entität verweist zu der Tabelle </a:t>
+            </a:r>
+            <a:r>
+              <a:rPr lang="de-DE" sz="2000" dirty="0" err="1"/>
+              <a:t>bestellung</a:t>
+            </a:r>
+            <a:endParaRPr lang="de-DE" sz="2000" dirty="0"/>
+          </a:p>
+        </p:txBody>
+      </p:sp>
+      <p:sp>
+        <p:nvSpPr>
+          <p:cNvPr id="4" name="Textplatzhalter 3">
+            <a:extLst>
+              <a:ext uri="{FF2B5EF4-FFF2-40B4-BE49-F238E27FC236}">
+                <a16:creationId xmlns:a16="http://schemas.microsoft.com/office/drawing/2014/main" id="{E750A630-EDDE-FB78-20FD-911899EE9690}"/>
+              </a:ext>
+            </a:extLst>
+          </p:cNvPr>
+          <p:cNvSpPr>
+            <a:spLocks noGrp="1"/>
+          </p:cNvSpPr>
+          <p:nvPr>
+            <p:ph type="body" sz="half" idx="2"/>
+          </p:nvPr>
+        </p:nvSpPr>
+        <p:spPr>
+          <a:xfrm>
+            <a:off x="1024127" y="2257506"/>
+            <a:ext cx="5735487" cy="3762294"/>
+          </a:xfrm>
+        </p:spPr>
+        <p:txBody>
+          <a:bodyPr>
+            <a:normAutofit/>
+          </a:bodyPr>
+          <a:lstStyle/>
+          <a:p>
+            <a:r>
+              <a:rPr lang="de-DE" sz="2400" dirty="0"/>
+              <a:t>ID für die Tabelle </a:t>
+            </a:r>
+            <a:r>
+              <a:rPr lang="de-DE" sz="2400" b="1" dirty="0" err="1"/>
+              <a:t>bestellung</a:t>
+            </a:r>
+            <a:r>
+              <a:rPr lang="de-DE" sz="2400" dirty="0"/>
+              <a:t> hinzugefügt </a:t>
             </a:r>
           </a:p>
         </p:txBody>
       </p:sp>
       <p:pic>
         <p:nvPicPr>
-          <p:cNvPr id="4" name="Inhaltsplatzhalter 3">
+          <p:cNvPr id="6" name="Grafik 5">
             <a:extLst>
               <a:ext uri="{FF2B5EF4-FFF2-40B4-BE49-F238E27FC236}">
-                <a16:creationId xmlns:a16="http://schemas.microsoft.com/office/drawing/2014/main" id="{02BC6DB6-5B84-37D0-3CED-F7872BBC6717}"/>
+                <a16:creationId xmlns:a16="http://schemas.microsoft.com/office/drawing/2014/main" id="{54EBB72D-A2D8-537C-EFF6-0CEAF39877DC}"/>
               </a:ext>
             </a:extLst>
           </p:cNvPr>
           <p:cNvPicPr>
-            <a:picLocks noGrp="1" noChangeAspect="1"/>
+            <a:picLocks noChangeAspect="1"/>
           </p:cNvPicPr>
-          <p:nvPr>
-            <p:ph idx="1"/>
-          </p:nvPr>
+          <p:nvPr/>
         </p:nvPicPr>
         <p:blipFill>
           <a:blip r:embed="rId2"/>
@@ -35262,99 +37917,8 @@
         </p:blipFill>
         <p:spPr>
           <a:xfrm>
-            <a:off x="1024128" y="2543052"/>
-            <a:ext cx="5295392" cy="1636118"/>
-          </a:xfrm>
-          <a:prstGeom prst="rect">
-            <a:avLst/>
-          </a:prstGeom>
-        </p:spPr>
-      </p:pic>
-      <p:pic>
-        <p:nvPicPr>
-          <p:cNvPr id="6" name="Grafik 5">
-            <a:extLst>
-              <a:ext uri="{FF2B5EF4-FFF2-40B4-BE49-F238E27FC236}">
-                <a16:creationId xmlns:a16="http://schemas.microsoft.com/office/drawing/2014/main" id="{3AB440EF-602F-76D1-BCC8-8FA0E2526F81}"/>
-              </a:ext>
-            </a:extLst>
-          </p:cNvPr>
-          <p:cNvPicPr>
-            <a:picLocks noChangeAspect="1"/>
-          </p:cNvPicPr>
-          <p:nvPr/>
-        </p:nvPicPr>
-        <p:blipFill>
-          <a:blip r:embed="rId3"/>
-          <a:srcRect l="13225"/>
-          <a:stretch>
-            <a:fillRect/>
-          </a:stretch>
-        </p:blipFill>
-        <p:spPr>
-          <a:xfrm>
-            <a:off x="1412239" y="4439539"/>
-            <a:ext cx="3967768" cy="1585341"/>
-          </a:xfrm>
-          <a:prstGeom prst="rect">
-            <a:avLst/>
-          </a:prstGeom>
-        </p:spPr>
-      </p:pic>
-      <p:pic>
-        <p:nvPicPr>
-          <p:cNvPr id="8" name="Grafik 7">
-            <a:extLst>
-              <a:ext uri="{FF2B5EF4-FFF2-40B4-BE49-F238E27FC236}">
-                <a16:creationId xmlns:a16="http://schemas.microsoft.com/office/drawing/2014/main" id="{25EC8704-3564-19D3-BAA3-E563F63878E6}"/>
-              </a:ext>
-            </a:extLst>
-          </p:cNvPr>
-          <p:cNvPicPr>
-            <a:picLocks noChangeAspect="1"/>
-          </p:cNvPicPr>
-          <p:nvPr/>
-        </p:nvPicPr>
-        <p:blipFill>
-          <a:blip r:embed="rId4"/>
-          <a:stretch>
-            <a:fillRect/>
-          </a:stretch>
-        </p:blipFill>
-        <p:spPr>
-          <a:xfrm>
-            <a:off x="6319520" y="2543052"/>
-            <a:ext cx="5287113" cy="1295581"/>
-          </a:xfrm>
-          <a:prstGeom prst="rect">
-            <a:avLst/>
-          </a:prstGeom>
-        </p:spPr>
-      </p:pic>
-      <p:pic>
-        <p:nvPicPr>
-          <p:cNvPr id="11" name="Grafik 10">
-            <a:extLst>
-              <a:ext uri="{FF2B5EF4-FFF2-40B4-BE49-F238E27FC236}">
-                <a16:creationId xmlns:a16="http://schemas.microsoft.com/office/drawing/2014/main" id="{CBCA025F-C884-CC08-BFE5-D673CF9E6D24}"/>
-              </a:ext>
-            </a:extLst>
-          </p:cNvPr>
-          <p:cNvPicPr>
-            <a:picLocks noChangeAspect="1"/>
-          </p:cNvPicPr>
-          <p:nvPr/>
-        </p:nvPicPr>
-        <p:blipFill>
-          <a:blip r:embed="rId5"/>
-          <a:stretch>
-            <a:fillRect/>
-          </a:stretch>
-        </p:blipFill>
-        <p:spPr>
-          <a:xfrm>
-            <a:off x="7727238" y="4439539"/>
-            <a:ext cx="1711401" cy="1516240"/>
+            <a:off x="798576" y="3275294"/>
+            <a:ext cx="8384266" cy="949465"/>
           </a:xfrm>
           <a:prstGeom prst="rect">
             <a:avLst/>
@@ -35364,25 +37928,204 @@
     </p:spTree>
     <p:extLst>
       <p:ext uri="{BB962C8B-B14F-4D97-AF65-F5344CB8AC3E}">
-        <p14:creationId xmlns:p14="http://schemas.microsoft.com/office/powerpoint/2010/main" val="2167317683"/>
+        <p14:creationId xmlns:p14="http://schemas.microsoft.com/office/powerpoint/2010/main" val="2748884308"/>
       </p:ext>
     </p:extLst>
   </p:cSld>
   <p:clrMapOvr>
     <a:masterClrMapping/>
   </p:clrMapOvr>
-  <mc:AlternateContent xmlns:mc="http://schemas.openxmlformats.org/markup-compatibility/2006" xmlns:p14="http://schemas.microsoft.com/office/powerpoint/2010/main">
-    <mc:Choice Requires="p14">
-      <p:transition spd="slow" p14:dur="800">
-        <p:circle/>
-      </p:transition>
-    </mc:Choice>
-    <mc:Fallback xmlns="">
-      <p:transition spd="slow">
-        <p:circle/>
-      </p:transition>
-    </mc:Fallback>
-  </mc:AlternateContent>
+  <p:timing>
+    <p:tnLst>
+      <p:par>
+        <p:cTn id="1" dur="indefinite" restart="never" nodeType="tmRoot">
+          <p:childTnLst>
+            <p:seq concurrent="1" nextAc="seek">
+              <p:cTn id="2" dur="indefinite" nodeType="mainSeq">
+                <p:childTnLst>
+                  <p:par>
+                    <p:cTn id="3" fill="hold">
+                      <p:stCondLst>
+                        <p:cond delay="indefinite"/>
+                      </p:stCondLst>
+                      <p:childTnLst>
+                        <p:par>
+                          <p:cTn id="4" fill="hold">
+                            <p:stCondLst>
+                              <p:cond delay="0"/>
+                            </p:stCondLst>
+                            <p:childTnLst>
+                              <p:par>
+                                <p:cTn id="5" presetID="22" presetClass="entr" presetSubtype="4" fill="hold" grpId="0" nodeType="clickEffect">
+                                  <p:stCondLst>
+                                    <p:cond delay="0"/>
+                                  </p:stCondLst>
+                                  <p:childTnLst>
+                                    <p:set>
+                                      <p:cBhvr>
+                                        <p:cTn id="6" dur="1" fill="hold">
+                                          <p:stCondLst>
+                                            <p:cond delay="0"/>
+                                          </p:stCondLst>
+                                        </p:cTn>
+                                        <p:tgtEl>
+                                          <p:spTgt spid="4">
+                                            <p:txEl>
+                                              <p:pRg st="0" end="0"/>
+                                            </p:txEl>
+                                          </p:spTgt>
+                                        </p:tgtEl>
+                                        <p:attrNameLst>
+                                          <p:attrName>style.visibility</p:attrName>
+                                        </p:attrNameLst>
+                                      </p:cBhvr>
+                                      <p:to>
+                                        <p:strVal val="visible"/>
+                                      </p:to>
+                                    </p:set>
+                                    <p:animEffect transition="in" filter="wipe(down)">
+                                      <p:cBhvr>
+                                        <p:cTn id="7" dur="500"/>
+                                        <p:tgtEl>
+                                          <p:spTgt spid="4">
+                                            <p:txEl>
+                                              <p:pRg st="0" end="0"/>
+                                            </p:txEl>
+                                          </p:spTgt>
+                                        </p:tgtEl>
+                                      </p:cBhvr>
+                                    </p:animEffect>
+                                  </p:childTnLst>
+                                </p:cTn>
+                              </p:par>
+                            </p:childTnLst>
+                          </p:cTn>
+                        </p:par>
+                      </p:childTnLst>
+                    </p:cTn>
+                  </p:par>
+                  <p:par>
+                    <p:cTn id="8" fill="hold">
+                      <p:stCondLst>
+                        <p:cond delay="indefinite"/>
+                      </p:stCondLst>
+                      <p:childTnLst>
+                        <p:par>
+                          <p:cTn id="9" fill="hold">
+                            <p:stCondLst>
+                              <p:cond delay="0"/>
+                            </p:stCondLst>
+                            <p:childTnLst>
+                              <p:par>
+                                <p:cTn id="10" presetID="6" presetClass="entr" presetSubtype="16" fill="hold" nodeType="clickEffect">
+                                  <p:stCondLst>
+                                    <p:cond delay="0"/>
+                                  </p:stCondLst>
+                                  <p:childTnLst>
+                                    <p:set>
+                                      <p:cBhvr>
+                                        <p:cTn id="11" dur="1" fill="hold">
+                                          <p:stCondLst>
+                                            <p:cond delay="0"/>
+                                          </p:stCondLst>
+                                        </p:cTn>
+                                        <p:tgtEl>
+                                          <p:spTgt spid="6"/>
+                                        </p:tgtEl>
+                                        <p:attrNameLst>
+                                          <p:attrName>style.visibility</p:attrName>
+                                        </p:attrNameLst>
+                                      </p:cBhvr>
+                                      <p:to>
+                                        <p:strVal val="visible"/>
+                                      </p:to>
+                                    </p:set>
+                                    <p:animEffect transition="in" filter="circle(in)">
+                                      <p:cBhvr>
+                                        <p:cTn id="12" dur="2000"/>
+                                        <p:tgtEl>
+                                          <p:spTgt spid="6"/>
+                                        </p:tgtEl>
+                                      </p:cBhvr>
+                                    </p:animEffect>
+                                  </p:childTnLst>
+                                </p:cTn>
+                              </p:par>
+                              <p:par>
+                                <p:cTn id="13" presetID="6" presetClass="entr" presetSubtype="16" fill="hold" grpId="0" nodeType="withEffect">
+                                  <p:stCondLst>
+                                    <p:cond delay="0"/>
+                                  </p:stCondLst>
+                                  <p:childTnLst>
+                                    <p:set>
+                                      <p:cBhvr>
+                                        <p:cTn id="14" dur="1" fill="hold">
+                                          <p:stCondLst>
+                                            <p:cond delay="0"/>
+                                          </p:stCondLst>
+                                        </p:cTn>
+                                        <p:tgtEl>
+                                          <p:spTgt spid="3">
+                                            <p:txEl>
+                                              <p:pRg st="0" end="0"/>
+                                            </p:txEl>
+                                          </p:spTgt>
+                                        </p:tgtEl>
+                                        <p:attrNameLst>
+                                          <p:attrName>style.visibility</p:attrName>
+                                        </p:attrNameLst>
+                                      </p:cBhvr>
+                                      <p:to>
+                                        <p:strVal val="visible"/>
+                                      </p:to>
+                                    </p:set>
+                                    <p:animEffect transition="in" filter="circle(in)">
+                                      <p:cBhvr>
+                                        <p:cTn id="15" dur="2000"/>
+                                        <p:tgtEl>
+                                          <p:spTgt spid="3">
+                                            <p:txEl>
+                                              <p:pRg st="0" end="0"/>
+                                            </p:txEl>
+                                          </p:spTgt>
+                                        </p:tgtEl>
+                                      </p:cBhvr>
+                                    </p:animEffect>
+                                  </p:childTnLst>
+                                </p:cTn>
+                              </p:par>
+                            </p:childTnLst>
+                          </p:cTn>
+                        </p:par>
+                      </p:childTnLst>
+                    </p:cTn>
+                  </p:par>
+                </p:childTnLst>
+              </p:cTn>
+              <p:prevCondLst>
+                <p:cond evt="onPrev" delay="0">
+                  <p:tgtEl>
+                    <p:sldTgt/>
+                  </p:tgtEl>
+                </p:cond>
+              </p:prevCondLst>
+              <p:nextCondLst>
+                <p:cond evt="onNext" delay="0">
+                  <p:tgtEl>
+                    <p:sldTgt/>
+                  </p:tgtEl>
+                </p:cond>
+              </p:nextCondLst>
+            </p:seq>
+          </p:childTnLst>
+        </p:cTn>
+      </p:par>
+    </p:tnLst>
+    <p:bldLst>
+      <p:bldP spid="3" grpId="0" build="p"/>
+      <p:bldP spid="4" grpId="0" build="p"/>
+    </p:bldLst>
+  </p:timing>
 </p:sld>
 </file>
 
@@ -36211,6 +38954,23 @@
 </file>
 
 <file path=customXml/item1.xml><?xml version="1.0" encoding="utf-8"?>
+<p:properties xmlns:p="http://schemas.microsoft.com/office/2006/metadata/properties" xmlns:xsi="http://www.w3.org/2001/XMLSchema-instance" xmlns:pc="http://schemas.microsoft.com/office/infopath/2007/PartnerControls">
+  <documentManagement>
+    <MediaServiceKeyPoints xmlns="71af3243-3dd4-4a8d-8c0d-dd76da1f02a5" xsi:nil="true"/>
+  </documentManagement>
+</p:properties>
+</file>
+
+<file path=customXml/item2.xml><?xml version="1.0" encoding="utf-8"?>
+<?mso-contentType ?>
+<FormTemplates xmlns="http://schemas.microsoft.com/sharepoint/v3/contenttype/forms">
+  <Display>DocumentLibraryForm</Display>
+  <Edit>DocumentLibraryForm</Edit>
+  <New>DocumentLibraryForm</New>
+</FormTemplates>
+</file>
+
+<file path=customXml/item3.xml><?xml version="1.0" encoding="utf-8"?>
 <ct:contentTypeSchema xmlns:ct="http://schemas.microsoft.com/office/2006/metadata/contentType" xmlns:ma="http://schemas.microsoft.com/office/2006/metadata/properties/metaAttributes" ct:_="" ma:_="" ma:contentTypeName="Document" ma:contentTypeID="0x01010079F111ED35F8CC479449609E8A0923A6" ma:contentTypeVersion="11" ma:contentTypeDescription="Create a new document." ma:contentTypeScope="" ma:versionID="9677210f24a1be23c92c90fd886aa0aa">
   <xsd:schema xmlns:xsd="http://www.w3.org/2001/XMLSchema" xmlns:xs="http://www.w3.org/2001/XMLSchema" xmlns:p="http://schemas.microsoft.com/office/2006/metadata/properties" xmlns:ns2="71af3243-3dd4-4a8d-8c0d-dd76da1f02a5" xmlns:ns3="16c05727-aa75-4e4a-9b5f-8a80a1165891" targetNamespace="http://schemas.microsoft.com/office/2006/metadata/properties" ma:root="true" ma:fieldsID="60e05723c5c1908df1a1a4ebf11d344e" ns2:_="" ns3:_="">
     <xsd:import namespace="71af3243-3dd4-4a8d-8c0d-dd76da1f02a5"/>
@@ -36421,24 +39181,32 @@
 </ct:contentTypeSchema>
 </file>
 
-<file path=customXml/item2.xml><?xml version="1.0" encoding="utf-8"?>
-<?mso-contentType ?>
-<FormTemplates xmlns="http://schemas.microsoft.com/sharepoint/v3/contenttype/forms">
-  <Display>DocumentLibraryForm</Display>
-  <Edit>DocumentLibraryForm</Edit>
-  <New>DocumentLibraryForm</New>
-</FormTemplates>
+<file path=customXml/itemProps1.xml><?xml version="1.0" encoding="utf-8"?>
+<ds:datastoreItem xmlns:ds="http://schemas.openxmlformats.org/officeDocument/2006/customXml" ds:itemID="{788A2F88-55C5-4ED1-9541-807C65424763}">
+  <ds:schemaRefs>
+    <ds:schemaRef ds:uri="http://purl.org/dc/dcmitype/"/>
+    <ds:schemaRef ds:uri="http://purl.org/dc/elements/1.1/"/>
+    <ds:schemaRef ds:uri="http://purl.org/dc/terms/"/>
+    <ds:schemaRef ds:uri="71af3243-3dd4-4a8d-8c0d-dd76da1f02a5"/>
+    <ds:schemaRef ds:uri="http://schemas.openxmlformats.org/package/2006/metadata/core-properties"/>
+    <ds:schemaRef ds:uri="16c05727-aa75-4e4a-9b5f-8a80a1165891"/>
+    <ds:schemaRef ds:uri="http://schemas.microsoft.com/office/2006/documentManagement/types"/>
+    <ds:schemaRef ds:uri="http://schemas.microsoft.com/office/infopath/2007/PartnerControls"/>
+    <ds:schemaRef ds:uri="http://schemas.microsoft.com/office/2006/metadata/properties"/>
+    <ds:schemaRef ds:uri="http://www.w3.org/XML/1998/namespace"/>
+  </ds:schemaRefs>
+</ds:datastoreItem>
 </file>
 
-<file path=customXml/item3.xml><?xml version="1.0" encoding="utf-8"?>
-<p:properties xmlns:p="http://schemas.microsoft.com/office/2006/metadata/properties" xmlns:xsi="http://www.w3.org/2001/XMLSchema-instance" xmlns:pc="http://schemas.microsoft.com/office/infopath/2007/PartnerControls">
-  <documentManagement>
-    <MediaServiceKeyPoints xmlns="71af3243-3dd4-4a8d-8c0d-dd76da1f02a5" xsi:nil="true"/>
-  </documentManagement>
-</p:properties>
+<file path=customXml/itemProps2.xml><?xml version="1.0" encoding="utf-8"?>
+<ds:datastoreItem xmlns:ds="http://schemas.openxmlformats.org/officeDocument/2006/customXml" ds:itemID="{4F44C90D-2A62-4985-9618-3460247437B1}">
+  <ds:schemaRefs>
+    <ds:schemaRef ds:uri="http://schemas.microsoft.com/sharepoint/v3/contenttype/forms"/>
+  </ds:schemaRefs>
+</ds:datastoreItem>
 </file>
 
-<file path=customXml/itemProps1.xml><?xml version="1.0" encoding="utf-8"?>
+<file path=customXml/itemProps3.xml><?xml version="1.0" encoding="utf-8"?>
 <ds:datastoreItem xmlns:ds="http://schemas.openxmlformats.org/officeDocument/2006/customXml" ds:itemID="{B61EAB5F-88FC-4FAE-AE3C-037A3C365EB8}">
   <ds:schemaRefs>
     <ds:schemaRef ds:uri="http://schemas.microsoft.com/office/2006/metadata/contentType"/>
@@ -36455,29 +39223,4 @@
     <ds:schemaRef ds:uri="http://schemas.microsoft.com/internal/obd"/>
   </ds:schemaRefs>
 </ds:datastoreItem>
-</file>
-
-<file path=customXml/itemProps2.xml><?xml version="1.0" encoding="utf-8"?>
-<ds:datastoreItem xmlns:ds="http://schemas.openxmlformats.org/officeDocument/2006/customXml" ds:itemID="{4F44C90D-2A62-4985-9618-3460247437B1}">
-  <ds:schemaRefs>
-    <ds:schemaRef ds:uri="http://schemas.microsoft.com/sharepoint/v3/contenttype/forms"/>
-  </ds:schemaRefs>
-</ds:datastoreItem>
-</file>
-
-<file path=customXml/itemProps3.xml><?xml version="1.0" encoding="utf-8"?>
-<ds:datastoreItem xmlns:ds="http://schemas.openxmlformats.org/officeDocument/2006/customXml" ds:itemID="{788A2F88-55C5-4ED1-9541-807C65424763}">
-  <ds:schemaRefs>
-    <ds:schemaRef ds:uri="http://purl.org/dc/dcmitype/"/>
-    <ds:schemaRef ds:uri="http://purl.org/dc/elements/1.1/"/>
-    <ds:schemaRef ds:uri="http://purl.org/dc/terms/"/>
-    <ds:schemaRef ds:uri="71af3243-3dd4-4a8d-8c0d-dd76da1f02a5"/>
-    <ds:schemaRef ds:uri="http://schemas.openxmlformats.org/package/2006/metadata/core-properties"/>
-    <ds:schemaRef ds:uri="16c05727-aa75-4e4a-9b5f-8a80a1165891"/>
-    <ds:schemaRef ds:uri="http://schemas.microsoft.com/office/2006/documentManagement/types"/>
-    <ds:schemaRef ds:uri="http://schemas.microsoft.com/office/infopath/2007/PartnerControls"/>
-    <ds:schemaRef ds:uri="http://schemas.microsoft.com/office/2006/metadata/properties"/>
-    <ds:schemaRef ds:uri="http://www.w3.org/XML/1998/namespace"/>
-  </ds:schemaRefs>
-</ds:datastoreItem>
 </file>